--- a/deck/第11章-上云部署-课件.pptx
+++ b/deck/第11章-上云部署-课件.pptx
@@ -12961,7 +12961,7 @@
               <a:buNone/>
             </a:pPr>
             <a:r>
-              <a:rPr lang="en-US" sz="1300" dirty="0">
+              <a:rPr lang="en-US" sz="1250" dirty="0">
                 <a:solidFill>
                   <a:srgbClr val="5A6B7B"/>
                 </a:solidFill>
@@ -12969,9 +12969,9 @@
                 <a:ea typeface="微软雅黑" pitchFamily="34" charset="-122"/>
                 <a:cs typeface="微软雅黑" pitchFamily="34" charset="-120"/>
               </a:rPr>
-              <a:t>注册中心选 MSE Nacos——3 个 SAE 应用和本地、路径 A/B 用同一个 Nacos，Dubbo 才能互相发现。</a:t>
-            </a:r>
-            <a:endParaRPr lang="en-US" sz="1300" dirty="0"/>
+              <a:t>Dubbo 3.x 在 SAE 必须接 MSE Nacos 专业版（内置 Nacos 不兼容）；注册中心在下一步“创建应用→高级设置”里选，不在命名空间这步。</a:t>
+            </a:r>
+            <a:endParaRPr lang="en-US" sz="1250" dirty="0"/>
           </a:p>
         </p:txBody>
       </p:sp>
@@ -13224,7 +13224,7 @@
                   <a:srgbClr val="1C7293"/>
                 </a:solidFill>
               </a:rPr>
-              <a:t>微服务注册中心选 MSE Nacos → 选你的实例</a:t>
+              <a:t>命名空间只做隔离，不在这里选注册中心（建应用时才选）</a:t>
             </a:r>
             <a:endParaRPr lang="en-US" sz="1400" dirty="0"/>
           </a:p>
@@ -15286,10 +15286,13 @@
           <a:lstStyle/>
           <a:p>
             <a:pPr indent="0" marL="0">
-              <a:buNone/>
-            </a:pPr>
-            <a:r>
-              <a:rPr lang="en-US" sz="1300" dirty="0">
+              <a:lnSpc>
+                <a:spcPct val="105000"/>
+              </a:lnSpc>
+              <a:buNone/>
+            </a:pPr>
+            <a:r>
+              <a:rPr lang="en-US" sz="1200" dirty="0">
                 <a:solidFill>
                   <a:srgbClr val="5A6B7B"/>
                 </a:solidFill>
@@ -15297,9 +15300,9 @@
                 <a:ea typeface="微软雅黑" pitchFamily="34" charset="-122"/>
                 <a:cs typeface="微软雅黑" pitchFamily="34" charset="-120"/>
               </a:rPr>
-              <a:t>创建应用：名称 userorder-sae · 命名空间 coffee-prod-sae · VPC 同 ECS · VSwitch 选已加白名单那个 · 实例数 1 · 0.5C/1G · 部署方式 JDK17 + 上传 jar</a:t>
-            </a:r>
-            <a:endParaRPr lang="en-US" sz="1300" dirty="0"/>
+              <a:t>创建应用：名称 userorder-sae · 命名空间 coffee-prod-sae · VPC 同 ECS · VSwitch 选已加白名单那个 · 实例数 1 · 0.5C/1G · 部署 JDK17+jar · 高级设置→服务注册发现选「MSE Nacos 专业版」→选你的实例（3 个应用都要选）</a:t>
+            </a:r>
+            <a:endParaRPr lang="en-US" sz="1200" dirty="0"/>
           </a:p>
         </p:txBody>
       </p:sp>
@@ -30913,7 +30916,7 @@
                 <a:ea typeface="微软雅黑" pitchFamily="34" charset="-122"/>
                 <a:cs typeface="微软雅黑" pitchFamily="34" charset="-120"/>
               </a:rPr>
-              <a:t>注册 + 配置中心</a:t>
+              <a:t>注册中心</a:t>
             </a:r>
             <a:endParaRPr lang="en-US" sz="1300" dirty="0"/>
           </a:p>
@@ -30930,7 +30933,7 @@
                 <a:ea typeface="微软雅黑" pitchFamily="34" charset="-122"/>
                 <a:cs typeface="微软雅黑" pitchFamily="34" charset="-120"/>
               </a:rPr>
-              <a:t>开发测试版即可</a:t>
+              <a:t>专业版（SAE 集成需要）</a:t>
             </a:r>
             <a:endParaRPr lang="en-US" sz="1300" dirty="0"/>
           </a:p>
@@ -31723,7 +31726,7 @@
                           <a:ea typeface="微软雅黑" pitchFamily="34" charset="-122"/>
                           <a:cs typeface="微软雅黑" pitchFamily="34" charset="-120"/>
                         </a:rPr>
-                        <a:t>引擎类型</a:t>
+                        <a:t>产品版本</a:t>
                       </a:r>
                       <a:endParaRPr lang="en-US" sz="1150" dirty="0">
                         <a:latin typeface="微软雅黑" charset="0"/>
@@ -31783,20 +31786,20 @@
                         <a:buNone/>
                       </a:pPr>
                       <a:r>
-                        <a:rPr lang="en-US" sz="1150" dirty="0">
+                        <a:rPr lang="en-US" sz="1150" b="1" dirty="0">
                           <a:solidFill>
-                            <a:srgbClr val="1C2B3A"/>
+                            <a:srgbClr val="B5630A"/>
                           </a:solidFill>
-                          <a:latin typeface="Consolas" pitchFamily="34" charset="0"/>
-                          <a:ea typeface="Consolas" pitchFamily="34" charset="-122"/>
-                          <a:cs typeface="Consolas" pitchFamily="34" charset="-120"/>
+                          <a:latin typeface="微软雅黑" pitchFamily="34" charset="0"/>
+                          <a:ea typeface="微软雅黑" pitchFamily="34" charset="-122"/>
+                          <a:cs typeface="微软雅黑" pitchFamily="34" charset="-120"/>
                         </a:rPr>
-                        <a:t>Nacos</a:t>
+                        <a:t>专业版（SAE 集成只认专业版）</a:t>
                       </a:r>
                       <a:endParaRPr lang="en-US" sz="1150" dirty="0">
-                        <a:latin typeface="Consolas" charset="0"/>
-                        <a:ea typeface="Consolas" charset="0"/>
-                        <a:cs typeface="Consolas" charset="0"/>
+                        <a:latin typeface="微软雅黑" charset="0"/>
+                        <a:ea typeface="微软雅黑" charset="0"/>
+                        <a:cs typeface="微软雅黑" charset="0"/>
                       </a:endParaRPr>
                     </a:p>
                   </a:txBody>
@@ -31861,7 +31864,7 @@
                           <a:ea typeface="微软雅黑" pitchFamily="34" charset="-122"/>
                           <a:cs typeface="微软雅黑" pitchFamily="34" charset="-120"/>
                         </a:rPr>
-                        <a:t>版本</a:t>
+                        <a:t>引擎 / 版本</a:t>
                       </a:r>
                       <a:endParaRPr lang="en-US" sz="1150" dirty="0">
                         <a:latin typeface="微软雅黑" charset="0"/>
@@ -31925,16 +31928,16 @@
                           <a:solidFill>
                             <a:srgbClr val="1C2B3A"/>
                           </a:solidFill>
-                          <a:latin typeface="微软雅黑" pitchFamily="34" charset="0"/>
-                          <a:ea typeface="微软雅黑" pitchFamily="34" charset="-122"/>
-                          <a:cs typeface="微软雅黑" pitchFamily="34" charset="-120"/>
+                          <a:latin typeface="Consolas" pitchFamily="34" charset="0"/>
+                          <a:ea typeface="Consolas" pitchFamily="34" charset="-122"/>
+                          <a:cs typeface="Consolas" pitchFamily="34" charset="-120"/>
                         </a:rPr>
-                        <a:t>2.x</a:t>
+                        <a:t>Nacos / 2.x</a:t>
                       </a:r>
                       <a:endParaRPr lang="en-US" sz="1150" dirty="0">
-                        <a:latin typeface="微软雅黑" charset="0"/>
-                        <a:ea typeface="微软雅黑" charset="0"/>
-                        <a:cs typeface="微软雅黑" charset="0"/>
+                        <a:latin typeface="Consolas" charset="0"/>
+                        <a:ea typeface="Consolas" charset="0"/>
+                        <a:cs typeface="Consolas" charset="0"/>
                       </a:endParaRPr>
                     </a:p>
                   </a:txBody>
@@ -31999,7 +32002,7 @@
                           <a:ea typeface="微软雅黑" pitchFamily="34" charset="-122"/>
                           <a:cs typeface="微软雅黑" pitchFamily="34" charset="-120"/>
                         </a:rPr>
-                        <a:t>实例规格</a:t>
+                        <a:t>集群节点数</a:t>
                       </a:r>
                       <a:endParaRPr lang="en-US" sz="1150" dirty="0">
                         <a:latin typeface="微软雅黑" charset="0"/>
@@ -32067,7 +32070,7 @@
                           <a:ea typeface="微软雅黑" pitchFamily="34" charset="-122"/>
                           <a:cs typeface="微软雅黑" pitchFamily="34" charset="-120"/>
                         </a:rPr>
-                        <a:t>开发测试版（够课程用）</a:t>
+                        <a:t>3（专业版最少 3、必须奇数）</a:t>
                       </a:r>
                       <a:endParaRPr lang="en-US" sz="1150" dirty="0">
                         <a:latin typeface="微软雅黑" charset="0"/>
@@ -32275,7 +32278,7 @@
                           <a:ea typeface="微软雅黑" pitchFamily="34" charset="-122"/>
                           <a:cs typeface="微软雅黑" pitchFamily="34" charset="-120"/>
                         </a:rPr>
-                        <a:t>公网访问</a:t>
+                        <a:t>公网带宽</a:t>
                       </a:r>
                       <a:endParaRPr lang="en-US" sz="1150" dirty="0">
                         <a:latin typeface="微软雅黑" charset="0"/>
@@ -32343,7 +32346,7 @@
                           <a:ea typeface="微软雅黑" pitchFamily="34" charset="-122"/>
                           <a:cs typeface="微软雅黑" pitchFamily="34" charset="-120"/>
                         </a:rPr>
-                        <a:t>勾上（本地调试用）</a:t>
+                        <a:t>拉到 &gt;0 才开公网（本地调试用）</a:t>
                       </a:r>
                       <a:endParaRPr lang="en-US" sz="1150" dirty="0">
                         <a:latin typeface="微软雅黑" charset="0"/>
@@ -32571,7 +32574,7 @@
               <a:buNone/>
             </a:pPr>
             <a:r>
-              <a:rPr lang="en-US" sz="1200" b="1" i="1" dirty="0">
+              <a:rPr lang="en-US" sz="1150" b="1" i="1" dirty="0">
                 <a:solidFill>
                   <a:srgbClr val="B5630A"/>
                 </a:solidFill>
@@ -32579,9 +32582,9 @@
                 <a:ea typeface="微软雅黑" pitchFamily="34" charset="-122"/>
                 <a:cs typeface="微软雅黑" pitchFamily="34" charset="-120"/>
               </a:rPr>
-              <a:t>🔥 MSE 必须和 ECS / RDS 同地域、同 VPC，否则云上走内网连不通。</a:t>
-            </a:r>
-            <a:endParaRPr lang="en-US" sz="1200" dirty="0"/>
+              <a:t>🔥 规格必须选专业版（Dubbo 3.x 走 SAE 的“MSE Nacos 专业版”官方集成，开发测试版接不进去）；且与 ECS / RDS 同地域、同 VPC。</a:t>
+            </a:r>
+            <a:endParaRPr lang="en-US" sz="1150" dirty="0"/>
           </a:p>
         </p:txBody>
       </p:sp>

--- a/deck/第11章-上云部署-课件.pptx
+++ b/deck/第11章-上云部署-课件.pptx
@@ -15331,7 +15331,7 @@
               <a:buNone/>
             </a:pPr>
             <a:r>
-              <a:rPr lang="en-US" sz="1500" b="1" dirty="0">
+              <a:rPr lang="en-US" sz="1450" b="1" dirty="0">
                 <a:solidFill>
                   <a:srgbClr val="0B2545"/>
                 </a:solidFill>
@@ -15339,9 +15339,9 @@
                 <a:ea typeface="微软雅黑" pitchFamily="34" charset="-122"/>
                 <a:cs typeface="微软雅黑" pitchFamily="34" charset="-120"/>
               </a:rPr>
-              <a:t>关键：环境变量用 RDS 内网地址（不是外网！）</a:t>
-            </a:r>
-            <a:endParaRPr lang="en-US" sz="1500" dirty="0"/>
+              <a:t>环境变量在「高级设置」第②步设；本项目只加一个 ENV=prod（DB 已写进 prod.yml 默认值）</a:t>
+            </a:r>
+            <a:endParaRPr lang="en-US" sz="1450" dirty="0"/>
           </a:p>
         </p:txBody>
       </p:sp>
@@ -15368,11 +15368,11 @@
             <a:tbl>
               <a:tblPr/>
               <a:tblGrid>
-                <a:gridCol w="1645920"/>
-                <a:gridCol w="2651760"/>
-                <a:gridCol w="2468880"/>
+                <a:gridCol w="2103120"/>
+                <a:gridCol w="1463040"/>
+                <a:gridCol w="3200400"/>
               </a:tblGrid>
-              <a:tr h="566928">
+              <a:tr h="658368">
                 <a:tc>
                   <a:txBody>
                     <a:bodyPr/>
@@ -15387,7 +15387,7 @@
                             <a:srgbClr val="FFFFFF"/>
                           </a:solidFill>
                         </a:rPr>
-                        <a:t>变量名</a:t>
+                        <a:t>环境变量</a:t>
                       </a:r>
                       <a:endParaRPr lang="en-US" sz="1350" dirty="0"/>
                     </a:p>
@@ -15557,7 +15557,7 @@
                   </a:tcPr>
                 </a:tc>
               </a:tr>
-              <a:tr h="566928">
+              <a:tr h="658368">
                 <a:tc>
                   <a:txBody>
                     <a:bodyPr/>
@@ -15711,7 +15711,7 @@
                           <a:ea typeface="微软雅黑" pitchFamily="34" charset="-122"/>
                           <a:cs typeface="微软雅黑" pitchFamily="34" charset="-120"/>
                         </a:rPr>
-                        <a:t>触发 prod 配置</a:t>
+                        <a:t>唯一必填：让 application-prod.yml 生效</a:t>
                       </a:r>
                       <a:endParaRPr lang="en-US" sz="1250" dirty="0">
                         <a:latin typeface="微软雅黑" charset="0"/>
@@ -15763,7 +15763,7 @@
                   </a:tcPr>
                 </a:tc>
               </a:tr>
-              <a:tr h="566928">
+              <a:tr h="658368">
                 <a:tc>
                   <a:txBody>
                     <a:bodyPr/>
@@ -15781,7 +15781,7 @@
                           <a:ea typeface="Consolas" pitchFamily="34" charset="-122"/>
                           <a:cs typeface="Consolas" pitchFamily="34" charset="-120"/>
                         </a:rPr>
-                        <a:t>DB_HOST</a:t>
+                        <a:t>DB_HOST / USER / PWD</a:t>
                       </a:r>
                       <a:endParaRPr lang="en-US" sz="1300" dirty="0">
                         <a:latin typeface="Consolas" charset="0"/>
@@ -15849,7 +15849,7 @@
                           <a:ea typeface="Consolas" pitchFamily="34" charset="-122"/>
                           <a:cs typeface="Consolas" pitchFamily="34" charset="-120"/>
                         </a:rPr>
-                        <a:t>rm-xxx:3306</a:t>
+                        <a:t>不用填</a:t>
                       </a:r>
                       <a:endParaRPr lang="en-US" sz="1300" dirty="0">
                         <a:latin typeface="Consolas" charset="0"/>
@@ -15917,7 +15917,7 @@
                           <a:ea typeface="微软雅黑" pitchFamily="34" charset="-122"/>
                           <a:cs typeface="微软雅黑" pitchFamily="34" charset="-120"/>
                         </a:rPr>
-                        <a:t>RDS 内网地址</a:t>
+                        <a:t>已写进 prod.yml 默认值；打包前填好 RDS 内网地址即可</a:t>
                       </a:r>
                       <a:endParaRPr lang="en-US" sz="1250" dirty="0">
                         <a:latin typeface="微软雅黑" charset="0"/>
@@ -15969,7 +15969,7 @@
                   </a:tcPr>
                 </a:tc>
               </a:tr>
-              <a:tr h="566928">
+              <a:tr h="658368">
                 <a:tc>
                   <a:txBody>
                     <a:bodyPr/>
@@ -15987,7 +15987,7 @@
                           <a:ea typeface="Consolas" pitchFamily="34" charset="-122"/>
                           <a:cs typeface="Consolas" pitchFamily="34" charset="-120"/>
                         </a:rPr>
-                        <a:t>DB_USER</a:t>
+                        <a:t>DUBBO_REGISTRY</a:t>
                       </a:r>
                       <a:endParaRPr lang="en-US" sz="1300" dirty="0">
                         <a:latin typeface="Consolas" charset="0"/>
@@ -16055,7 +16055,7 @@
                           <a:ea typeface="Consolas" pitchFamily="34" charset="-122"/>
                           <a:cs typeface="Consolas" pitchFamily="34" charset="-120"/>
                         </a:rPr>
-                        <a:t>userordertest</a:t>
+                        <a:t>不用填</a:t>
                       </a:r>
                       <a:endParaRPr lang="en-US" sz="1300" dirty="0">
                         <a:latin typeface="Consolas" charset="0"/>
@@ -16123,213 +16123,7 @@
                           <a:ea typeface="微软雅黑" pitchFamily="34" charset="-122"/>
                           <a:cs typeface="微软雅黑" pitchFamily="34" charset="-120"/>
                         </a:rPr>
-                        <a:t>准备时建的账号</a:t>
-                      </a:r>
-                      <a:endParaRPr lang="en-US" sz="1250" dirty="0">
-                        <a:latin typeface="微软雅黑" charset="0"/>
-                        <a:ea typeface="微软雅黑" charset="0"/>
-                        <a:cs typeface="微软雅黑" charset="0"/>
-                      </a:endParaRPr>
-                    </a:p>
-                  </a:txBody>
-                  <a:tcPr marL="91440" marR="91440" marT="45720" marB="45720" anchor="ctr">
-                    <a:lnL w="12700" cap="flat" cmpd="sng" algn="ctr">
-                      <a:solidFill>
-                        <a:srgbClr val="D6DEE8"/>
-                      </a:solidFill>
-                      <a:prstDash val="solid"/>
-                      <a:round/>
-                      <a:headEnd type="none" w="med" len="med"/>
-                      <a:tailEnd type="none" w="med" len="med"/>
-                    </a:lnL>
-                    <a:lnR w="12700" cap="flat" cmpd="sng" algn="ctr">
-                      <a:solidFill>
-                        <a:srgbClr val="D6DEE8"/>
-                      </a:solidFill>
-                      <a:prstDash val="solid"/>
-                      <a:round/>
-                      <a:headEnd type="none" w="med" len="med"/>
-                      <a:tailEnd type="none" w="med" len="med"/>
-                    </a:lnR>
-                    <a:lnT w="12700" cap="flat" cmpd="sng" algn="ctr">
-                      <a:solidFill>
-                        <a:srgbClr val="D6DEE8"/>
-                      </a:solidFill>
-                      <a:prstDash val="solid"/>
-                      <a:round/>
-                      <a:headEnd type="none" w="med" len="med"/>
-                      <a:tailEnd type="none" w="med" len="med"/>
-                    </a:lnT>
-                    <a:lnB w="12700" cap="flat" cmpd="sng" algn="ctr">
-                      <a:solidFill>
-                        <a:srgbClr val="D6DEE8"/>
-                      </a:solidFill>
-                      <a:prstDash val="solid"/>
-                      <a:round/>
-                      <a:headEnd type="none" w="med" len="med"/>
-                      <a:tailEnd type="none" w="med" len="med"/>
-                    </a:lnB>
-                    <a:solidFill>
-                      <a:srgbClr val="FFFFFF"/>
-                    </a:solidFill>
-                  </a:tcPr>
-                </a:tc>
-              </a:tr>
-              <a:tr h="566928">
-                <a:tc>
-                  <a:txBody>
-                    <a:bodyPr/>
-                    <a:lstStyle/>
-                    <a:p>
-                      <a:pPr algn="ctr" indent="0" marL="0">
-                        <a:buNone/>
-                      </a:pPr>
-                      <a:r>
-                        <a:rPr lang="en-US" sz="1300" b="1" dirty="0">
-                          <a:solidFill>
-                            <a:srgbClr val="0B2545"/>
-                          </a:solidFill>
-                          <a:latin typeface="Consolas" pitchFamily="34" charset="0"/>
-                          <a:ea typeface="Consolas" pitchFamily="34" charset="-122"/>
-                          <a:cs typeface="Consolas" pitchFamily="34" charset="-120"/>
-                        </a:rPr>
-                        <a:t>DB_PASSWORD</a:t>
-                      </a:r>
-                      <a:endParaRPr lang="en-US" sz="1300" dirty="0">
-                        <a:latin typeface="Consolas" charset="0"/>
-                        <a:ea typeface="Consolas" charset="0"/>
-                        <a:cs typeface="Consolas" charset="0"/>
-                      </a:endParaRPr>
-                    </a:p>
-                  </a:txBody>
-                  <a:tcPr marL="91440" marR="91440" marT="45720" marB="45720" anchor="ctr">
-                    <a:lnL w="12700" cap="flat" cmpd="sng" algn="ctr">
-                      <a:solidFill>
-                        <a:srgbClr val="D6DEE8"/>
-                      </a:solidFill>
-                      <a:prstDash val="solid"/>
-                      <a:round/>
-                      <a:headEnd type="none" w="med" len="med"/>
-                      <a:tailEnd type="none" w="med" len="med"/>
-                    </a:lnL>
-                    <a:lnR w="12700" cap="flat" cmpd="sng" algn="ctr">
-                      <a:solidFill>
-                        <a:srgbClr val="D6DEE8"/>
-                      </a:solidFill>
-                      <a:prstDash val="solid"/>
-                      <a:round/>
-                      <a:headEnd type="none" w="med" len="med"/>
-                      <a:tailEnd type="none" w="med" len="med"/>
-                    </a:lnR>
-                    <a:lnT w="12700" cap="flat" cmpd="sng" algn="ctr">
-                      <a:solidFill>
-                        <a:srgbClr val="D6DEE8"/>
-                      </a:solidFill>
-                      <a:prstDash val="solid"/>
-                      <a:round/>
-                      <a:headEnd type="none" w="med" len="med"/>
-                      <a:tailEnd type="none" w="med" len="med"/>
-                    </a:lnT>
-                    <a:lnB w="12700" cap="flat" cmpd="sng" algn="ctr">
-                      <a:solidFill>
-                        <a:srgbClr val="D6DEE8"/>
-                      </a:solidFill>
-                      <a:prstDash val="solid"/>
-                      <a:round/>
-                      <a:headEnd type="none" w="med" len="med"/>
-                      <a:tailEnd type="none" w="med" len="med"/>
-                    </a:lnB>
-                    <a:solidFill>
-                      <a:srgbClr val="FFFFFF"/>
-                    </a:solidFill>
-                  </a:tcPr>
-                </a:tc>
-                <a:tc>
-                  <a:txBody>
-                    <a:bodyPr/>
-                    <a:lstStyle/>
-                    <a:p>
-                      <a:pPr algn="l" indent="0" marL="0">
-                        <a:buNone/>
-                      </a:pPr>
-                      <a:r>
-                        <a:rPr lang="en-US" sz="1300" dirty="0">
-                          <a:solidFill>
-                            <a:srgbClr val="1C2B3A"/>
-                          </a:solidFill>
-                          <a:latin typeface="Consolas" pitchFamily="34" charset="0"/>
-                          <a:ea typeface="Consolas" pitchFamily="34" charset="-122"/>
-                          <a:cs typeface="Consolas" pitchFamily="34" charset="-120"/>
-                        </a:rPr>
-                        <a:t>你的 RDS 密码</a:t>
-                      </a:r>
-                      <a:endParaRPr lang="en-US" sz="1300" dirty="0">
-                        <a:latin typeface="Consolas" charset="0"/>
-                        <a:ea typeface="Consolas" charset="0"/>
-                        <a:cs typeface="Consolas" charset="0"/>
-                      </a:endParaRPr>
-                    </a:p>
-                  </a:txBody>
-                  <a:tcPr marL="91440" marR="91440" marT="45720" marB="45720" anchor="ctr">
-                    <a:lnL w="12700" cap="flat" cmpd="sng" algn="ctr">
-                      <a:solidFill>
-                        <a:srgbClr val="D6DEE8"/>
-                      </a:solidFill>
-                      <a:prstDash val="solid"/>
-                      <a:round/>
-                      <a:headEnd type="none" w="med" len="med"/>
-                      <a:tailEnd type="none" w="med" len="med"/>
-                    </a:lnL>
-                    <a:lnR w="12700" cap="flat" cmpd="sng" algn="ctr">
-                      <a:solidFill>
-                        <a:srgbClr val="D6DEE8"/>
-                      </a:solidFill>
-                      <a:prstDash val="solid"/>
-                      <a:round/>
-                      <a:headEnd type="none" w="med" len="med"/>
-                      <a:tailEnd type="none" w="med" len="med"/>
-                    </a:lnR>
-                    <a:lnT w="12700" cap="flat" cmpd="sng" algn="ctr">
-                      <a:solidFill>
-                        <a:srgbClr val="D6DEE8"/>
-                      </a:solidFill>
-                      <a:prstDash val="solid"/>
-                      <a:round/>
-                      <a:headEnd type="none" w="med" len="med"/>
-                      <a:tailEnd type="none" w="med" len="med"/>
-                    </a:lnT>
-                    <a:lnB w="12700" cap="flat" cmpd="sng" algn="ctr">
-                      <a:solidFill>
-                        <a:srgbClr val="D6DEE8"/>
-                      </a:solidFill>
-                      <a:prstDash val="solid"/>
-                      <a:round/>
-                      <a:headEnd type="none" w="med" len="med"/>
-                      <a:tailEnd type="none" w="med" len="med"/>
-                    </a:lnB>
-                    <a:solidFill>
-                      <a:srgbClr val="FFFFFF"/>
-                    </a:solidFill>
-                  </a:tcPr>
-                </a:tc>
-                <a:tc>
-                  <a:txBody>
-                    <a:bodyPr/>
-                    <a:lstStyle/>
-                    <a:p>
-                      <a:pPr algn="l" indent="0" marL="0">
-                        <a:buNone/>
-                      </a:pPr>
-                      <a:r>
-                        <a:rPr lang="en-US" sz="1250" dirty="0">
-                          <a:solidFill>
-                            <a:srgbClr val="1C2B3A"/>
-                          </a:solidFill>
-                          <a:latin typeface="微软雅黑" pitchFamily="34" charset="0"/>
-                          <a:ea typeface="微软雅黑" pitchFamily="34" charset="-122"/>
-                          <a:cs typeface="微软雅黑" pitchFamily="34" charset="-120"/>
-                        </a:rPr>
-                        <a:t>准备时记下的</a:t>
+                        <a:t>已选「服务注册发现→MSE Nacos 专业版」，SAE 接管</a:t>
                       </a:r>
                       <a:endParaRPr lang="en-US" sz="1250" dirty="0">
                         <a:latin typeface="微软雅黑" charset="0"/>

--- a/deck/第11章-上云部署-课件.pptx
+++ b/deck/第11章-上云部署-课件.pptx
@@ -3564,6 +3564,10 @@
           </a:solidFill>
           <a:ln/>
         </p:spPr>
+        <p:txBody>
+          <a:bodyPr/>
+          <a:p/>
+        </p:txBody>
       </p:sp>
       <p:sp>
         <p:nvSpPr>
@@ -3584,6 +3588,10 @@
           </a:solidFill>
           <a:ln/>
         </p:spPr>
+        <p:txBody>
+          <a:bodyPr/>
+          <a:p/>
+        </p:txBody>
       </p:sp>
       <p:sp>
         <p:nvSpPr>
@@ -3728,6 +3736,10 @@
             <a:prstDash val="solid"/>
           </a:ln>
         </p:spPr>
+        <p:txBody>
+          <a:bodyPr/>
+          <a:p/>
+        </p:txBody>
       </p:sp>
       <p:sp>
         <p:nvSpPr>
@@ -3833,6 +3845,10 @@
             <a:prstDash val="solid"/>
           </a:ln>
         </p:spPr>
+        <p:txBody>
+          <a:bodyPr/>
+          <a:p/>
+        </p:txBody>
       </p:sp>
       <p:sp>
         <p:nvSpPr>
@@ -3938,6 +3954,10 @@
             <a:prstDash val="solid"/>
           </a:ln>
         </p:spPr>
+        <p:txBody>
+          <a:bodyPr/>
+          <a:p/>
+        </p:txBody>
       </p:sp>
       <p:sp>
         <p:nvSpPr>
@@ -4107,6 +4127,10 @@
           </a:solidFill>
           <a:ln/>
         </p:spPr>
+        <p:txBody>
+          <a:bodyPr/>
+          <a:p/>
+        </p:txBody>
       </p:sp>
       <p:sp>
         <p:nvSpPr>
@@ -4127,6 +4151,10 @@
           </a:solidFill>
           <a:ln/>
         </p:spPr>
+        <p:txBody>
+          <a:bodyPr/>
+          <a:p/>
+        </p:txBody>
       </p:sp>
       <p:sp>
         <p:nvSpPr>
@@ -4200,7 +4228,7 @@
                 <a:ea typeface="微软雅黑" pitchFamily="34" charset="-122"/>
                 <a:cs typeface="微软雅黑" pitchFamily="34" charset="-120"/>
               </a:rPr>
-              <a:t>开 Agent 端口 + 建微服务空间</a:t>
+              <a:t>确认出方向放行 + 建微服务空间</a:t>
             </a:r>
             <a:endParaRPr lang="en-US" sz="2800" dirty="0"/>
           </a:p>
@@ -4317,6 +4345,10 @@
             </a:outerShdw>
           </a:effectLst>
         </p:spPr>
+        <p:txBody>
+          <a:bodyPr/>
+          <a:p/>
+        </p:txBody>
       </p:sp>
       <p:sp>
         <p:nvSpPr>
@@ -4351,7 +4383,7 @@
                 <a:ea typeface="微软雅黑" pitchFamily="34" charset="-122"/>
                 <a:cs typeface="微软雅黑" pitchFamily="34" charset="-120"/>
               </a:rPr>
-              <a:t>① 给 3 台 ECS 开 Agent 出方向端口</a:t>
+              <a:t>① 确认 3 台 ECS 出方向默认放行</a:t>
             </a:r>
             <a:endParaRPr lang="en-US" sz="1450" dirty="0"/>
           </a:p>
@@ -4391,7 +4423,7 @@
                   <a:srgbClr val="1C2B3A"/>
                 </a:solidFill>
               </a:rPr>
-              <a:t>ECS 控制台 → ECS 的“安全组”→ 访问规则 → 出方向 → 手动添加</a:t>
+              <a:t>ECS 控制台 → ECS 的“安全组”→ 访问规则 → 出方向</a:t>
             </a:r>
             <a:endParaRPr lang="en-US" sz="1250" dirty="0"/>
           </a:p>
@@ -4409,7 +4441,7 @@
                   <a:srgbClr val="1C2B3A"/>
                 </a:solidFill>
               </a:rPr>
-              <a:t>加 3 条 TCP（授权对象 0.0.0.0/0）：</a:t>
+              <a:t>确认默认“允许全部”规则还在即可。</a:t>
             </a:r>
             <a:endParaRPr lang="en-US" sz="1250" dirty="0"/>
           </a:p>
@@ -4429,7 +4461,7 @@
                 <a:ea typeface="Consolas" pitchFamily="34" charset="-122"/>
                 <a:cs typeface="Consolas" pitchFamily="34" charset="-120"/>
               </a:rPr>
-              <a:t>8442/8442 · 8443/8443 · 8883/8883</a:t>
+              <a:t>EDAS 导入时还会自动添加所需规则，勿删改</a:t>
             </a:r>
             <a:endParaRPr lang="en-US" sz="1250" dirty="0"/>
           </a:p>
@@ -4444,7 +4476,7 @@
                   <a:srgbClr val="1C2B3A"/>
                 </a:solidFill>
               </a:rPr>
-              <a:t>3 台都做（共用一个安全组就只做一次）</a:t>
+              <a:t>官方未要求手动加任何出方向端口</a:t>
             </a:r>
             <a:endParaRPr lang="en-US" sz="1250" dirty="0"/>
           </a:p>
@@ -4483,7 +4515,7 @@
                 <a:ea typeface="微软雅黑" pitchFamily="34" charset="-122"/>
                 <a:cs typeface="微软雅黑" pitchFamily="34" charset="-120"/>
               </a:rPr>
-              <a:t>不开 → 治理页永远“没有数据”。</a:t>
+              <a:t>出方向被收紧 → 治理页“没有数据”。</a:t>
             </a:r>
             <a:endParaRPr lang="en-US" sz="1200" dirty="0"/>
           </a:p>
@@ -4522,6 +4554,10 @@
             </a:outerShdw>
           </a:effectLst>
         </p:spPr>
+        <p:txBody>
+          <a:bodyPr/>
+          <a:p/>
+        </p:txBody>
       </p:sp>
       <p:sp>
         <p:nvSpPr>
@@ -5414,6 +5450,10 @@
           </a:solidFill>
           <a:ln/>
         </p:spPr>
+        <p:txBody>
+          <a:bodyPr/>
+          <a:p/>
+        </p:txBody>
       </p:sp>
       <p:sp>
         <p:nvSpPr>
@@ -5434,6 +5474,10 @@
           </a:solidFill>
           <a:ln/>
         </p:spPr>
+        <p:txBody>
+          <a:bodyPr/>
+          <a:p/>
+        </p:txBody>
       </p:sp>
       <p:sp>
         <p:nvSpPr>
@@ -5624,6 +5668,10 @@
             </a:outerShdw>
           </a:effectLst>
         </p:spPr>
+        <p:txBody>
+          <a:bodyPr/>
+          <a:p/>
+        </p:txBody>
       </p:sp>
       <p:sp>
         <p:nvSpPr>
@@ -6530,46 +6578,40 @@
             <a:prstDash val="solid"/>
           </a:ln>
         </p:spPr>
-      </p:sp>
-      <p:sp>
-        <p:nvSpPr>
-          <p:cNvPr id="15" name="Text 12"/>
-          <p:cNvSpPr/>
-          <p:nvPr/>
-        </p:nvSpPr>
-        <p:spPr>
-          <a:xfrm>
-            <a:off x="6858000" y="1325880"/>
-            <a:ext cx="4572000" cy="4663440"/>
-          </a:xfrm>
-          <a:prstGeom prst="rect">
-            <a:avLst/>
-          </a:prstGeom>
-          <a:noFill/>
-          <a:ln/>
-        </p:spPr>
-        <p:txBody>
-          <a:bodyPr wrap="square" lIns="0" tIns="0" rIns="0" bIns="0" rtlCol="0" anchor="ctr"/>
-          <a:lstStyle/>
-          <a:p>
-            <a:pPr algn="ctr" indent="0" marL="0">
-              <a:buNone/>
-            </a:pPr>
-            <a:r>
-              <a:rPr lang="en-US" sz="4600" dirty="0">
-                <a:solidFill>
-                  <a:srgbClr val="9FB0C2"/>
-                </a:solidFill>
-                <a:latin typeface="微软雅黑" pitchFamily="34" charset="0"/>
-                <a:ea typeface="微软雅黑" pitchFamily="34" charset="-122"/>
-                <a:cs typeface="微软雅黑" pitchFamily="34" charset="-120"/>
-              </a:rPr>
-              <a:t>📷</a:t>
-            </a:r>
-            <a:endParaRPr lang="en-US" sz="4600" dirty="0"/>
-          </a:p>
-        </p:txBody>
-      </p:sp>
+        <p:txBody>
+          <a:bodyPr/>
+          <a:p/>
+        </p:txBody>
+      </p:sp>
+      <p:pic>
+        <p:nvPicPr>
+          <p:cNvPr id="16" name="Picture 15" descr="p521247.png"/>
+          <p:cNvPicPr>
+            <a:picLocks noChangeAspect="1"/>
+          </p:cNvPicPr>
+          <p:nvPr/>
+        </p:nvPicPr>
+        <p:blipFill>
+          <a:blip r:embed="rId3"/>
+          <a:stretch>
+            <a:fillRect/>
+          </a:stretch>
+        </p:blipFill>
+        <p:spPr>
+          <a:xfrm>
+            <a:off x="6858000" y="2062883"/>
+            <a:ext cx="4572000" cy="3189434"/>
+          </a:xfrm>
+          <a:prstGeom prst="rect">
+            <a:avLst/>
+          </a:prstGeom>
+          <a:ln w="9525">
+            <a:solidFill>
+              <a:srgbClr val="CCCCCC"/>
+            </a:solidFill>
+          </a:ln>
+        </p:spPr>
+      </p:pic>
     </p:spTree>
   </p:cSld>
   <p:clrMapOvr>
@@ -6621,6 +6663,10 @@
           </a:solidFill>
           <a:ln/>
         </p:spPr>
+        <p:txBody>
+          <a:bodyPr/>
+          <a:p/>
+        </p:txBody>
       </p:sp>
       <p:sp>
         <p:nvSpPr>
@@ -6641,6 +6687,10 @@
           </a:solidFill>
           <a:ln/>
         </p:spPr>
+        <p:txBody>
+          <a:bodyPr/>
+          <a:p/>
+        </p:txBody>
       </p:sp>
       <p:sp>
         <p:nvSpPr>
@@ -8004,6 +8054,10 @@
             </a:outerShdw>
           </a:effectLst>
         </p:spPr>
+        <p:txBody>
+          <a:bodyPr/>
+          <a:p/>
+        </p:txBody>
       </p:sp>
       <p:sp>
         <p:nvSpPr>
@@ -8070,6 +8124,10 @@
             <a:prstDash val="solid"/>
           </a:ln>
         </p:spPr>
+        <p:txBody>
+          <a:bodyPr/>
+          <a:p/>
+        </p:txBody>
       </p:sp>
       <p:sp>
         <p:nvSpPr>
@@ -8346,6 +8404,10 @@
           </a:solidFill>
           <a:ln/>
         </p:spPr>
+        <p:txBody>
+          <a:bodyPr/>
+          <a:p/>
+        </p:txBody>
       </p:sp>
       <p:sp>
         <p:nvSpPr>
@@ -8366,6 +8428,10 @@
           </a:solidFill>
           <a:ln/>
         </p:spPr>
+        <p:txBody>
+          <a:bodyPr/>
+          <a:p/>
+        </p:txBody>
       </p:sp>
       <p:sp>
         <p:nvSpPr>
@@ -8556,6 +8622,10 @@
             </a:outerShdw>
           </a:effectLst>
         </p:spPr>
+        <p:txBody>
+          <a:bodyPr/>
+          <a:p/>
+        </p:txBody>
       </p:sp>
       <p:sp>
         <p:nvSpPr>
@@ -8702,6 +8772,10 @@
             </a:outerShdw>
           </a:effectLst>
         </p:spPr>
+        <p:txBody>
+          <a:bodyPr/>
+          <a:p/>
+        </p:txBody>
       </p:sp>
       <p:sp>
         <p:nvSpPr>
@@ -8890,6 +8964,10 @@
             </a:outerShdw>
           </a:effectLst>
         </p:spPr>
+        <p:txBody>
+          <a:bodyPr/>
+          <a:p/>
+        </p:txBody>
       </p:sp>
       <p:sp>
         <p:nvSpPr>
@@ -9036,6 +9114,10 @@
           </a:solidFill>
           <a:ln/>
         </p:spPr>
+        <p:txBody>
+          <a:bodyPr/>
+          <a:p/>
+        </p:txBody>
       </p:sp>
       <p:sp>
         <p:nvSpPr>
@@ -9056,6 +9138,10 @@
           </a:solidFill>
           <a:ln/>
         </p:spPr>
+        <p:txBody>
+          <a:bodyPr/>
+          <a:p/>
+        </p:txBody>
       </p:sp>
       <p:sp>
         <p:nvSpPr>
@@ -9246,6 +9332,10 @@
             </a:outerShdw>
           </a:effectLst>
         </p:spPr>
+        <p:txBody>
+          <a:bodyPr/>
+          <a:p/>
+        </p:txBody>
       </p:sp>
       <p:sp>
         <p:nvSpPr>
@@ -9428,6 +9518,10 @@
             </a:outerShdw>
           </a:effectLst>
         </p:spPr>
+        <p:txBody>
+          <a:bodyPr/>
+          <a:p/>
+        </p:txBody>
       </p:sp>
       <p:sp>
         <p:nvSpPr>
@@ -9521,7 +9615,7 @@
                   <a:srgbClr val="1C2B3A"/>
                 </a:solidFill>
               </a:rPr>
-              <a:t>RDS / MSE 各有独立的访问白名单，和 VPC 无关——就算同 VPC、网络通，源 IP 不在白名单照样连不上。SAE 实例 IP 从 VSwitch 网段动态分配（弹性 ENI、会变），没有固定 IP，所以要把整个 VSwitch 网段加进 RDS / MSE 白名单。</a:t>
+              <a:t>RDS / MSE 各有独立的访问白名单，和 VPC 无关——就算同 VPC、网络通，源 IP 不在白名单照样连不上。SAE 实例 IP 从 虚拟交换机 网段动态分配（弹性 ENI、会变），没有固定 IP，所以要把整个 虚拟交换机 网段加进 RDS / MSE 白名单。</a:t>
             </a:r>
             <a:endParaRPr lang="en-US" sz="1400" dirty="0"/>
           </a:p>
@@ -9612,6 +9706,10 @@
           </a:solidFill>
           <a:ln/>
         </p:spPr>
+        <p:txBody>
+          <a:bodyPr/>
+          <a:p/>
+        </p:txBody>
       </p:sp>
       <p:sp>
         <p:nvSpPr>
@@ -9632,6 +9730,10 @@
           </a:solidFill>
           <a:ln/>
         </p:spPr>
+        <p:txBody>
+          <a:bodyPr/>
+          <a:p/>
+        </p:txBody>
       </p:sp>
       <p:sp>
         <p:nvSpPr>
@@ -9815,6 +9917,10 @@
             <a:prstDash val="solid"/>
           </a:ln>
         </p:spPr>
+        <p:txBody>
+          <a:bodyPr/>
+          <a:p/>
+        </p:txBody>
       </p:sp>
       <p:sp>
         <p:nvSpPr>
@@ -9878,6 +9984,10 @@
             <a:tailEnd type="triangle"/>
           </a:ln>
         </p:spPr>
+        <p:txBody>
+          <a:bodyPr/>
+          <a:p/>
+        </p:txBody>
       </p:sp>
       <p:sp>
         <p:nvSpPr>
@@ -9905,6 +10015,10 @@
             <a:prstDash val="solid"/>
           </a:ln>
         </p:spPr>
+        <p:txBody>
+          <a:bodyPr/>
+          <a:p/>
+        </p:txBody>
       </p:sp>
       <p:sp>
         <p:nvSpPr>
@@ -9968,6 +10082,10 @@
             <a:tailEnd type="triangle"/>
           </a:ln>
         </p:spPr>
+        <p:txBody>
+          <a:bodyPr/>
+          <a:p/>
+        </p:txBody>
       </p:sp>
       <p:sp>
         <p:nvSpPr>
@@ -9995,6 +10113,10 @@
             <a:prstDash val="solid"/>
           </a:ln>
         </p:spPr>
+        <p:txBody>
+          <a:bodyPr/>
+          <a:p/>
+        </p:txBody>
       </p:sp>
       <p:sp>
         <p:nvSpPr>
@@ -10046,7 +10168,7 @@
                 <a:ea typeface="微软雅黑" pitchFamily="34" charset="-122"/>
                 <a:cs typeface="微软雅黑" pitchFamily="34" charset="-120"/>
               </a:rPr>
-              <a:t>(VSwitch)</a:t>
+              <a:t>(虚拟交换机)</a:t>
             </a:r>
             <a:endParaRPr lang="en-US" sz="1250" dirty="0"/>
           </a:p>
@@ -10075,6 +10197,10 @@
             <a:tailEnd type="triangle"/>
           </a:ln>
         </p:spPr>
+        <p:txBody>
+          <a:bodyPr/>
+          <a:p/>
+        </p:txBody>
       </p:sp>
       <p:sp>
         <p:nvSpPr>
@@ -10102,6 +10228,10 @@
             <a:prstDash val="solid"/>
           </a:ln>
         </p:spPr>
+        <p:txBody>
+          <a:bodyPr/>
+          <a:p/>
+        </p:txBody>
       </p:sp>
       <p:sp>
         <p:nvSpPr>
@@ -10165,6 +10295,10 @@
             <a:tailEnd type="triangle"/>
           </a:ln>
         </p:spPr>
+        <p:txBody>
+          <a:bodyPr/>
+          <a:p/>
+        </p:txBody>
       </p:sp>
       <p:sp>
         <p:nvSpPr>
@@ -10192,6 +10326,10 @@
             <a:prstDash val="solid"/>
           </a:ln>
         </p:spPr>
+        <p:txBody>
+          <a:bodyPr/>
+          <a:p/>
+        </p:txBody>
       </p:sp>
       <p:sp>
         <p:nvSpPr>
@@ -10255,6 +10393,10 @@
             <a:tailEnd type="triangle"/>
           </a:ln>
         </p:spPr>
+        <p:txBody>
+          <a:bodyPr/>
+          <a:p/>
+        </p:txBody>
       </p:sp>
       <p:sp>
         <p:nvSpPr>
@@ -10282,6 +10424,10 @@
             <a:prstDash val="solid"/>
           </a:ln>
         </p:spPr>
+        <p:txBody>
+          <a:bodyPr/>
+          <a:p/>
+        </p:txBody>
       </p:sp>
       <p:sp>
         <p:nvSpPr>
@@ -10394,6 +10540,10 @@
             </a:outerShdw>
           </a:effectLst>
         </p:spPr>
+        <p:txBody>
+          <a:bodyPr/>
+          <a:p/>
+        </p:txBody>
       </p:sp>
       <p:sp>
         <p:nvSpPr>
@@ -10502,6 +10652,10 @@
           </a:solidFill>
           <a:ln/>
         </p:spPr>
+        <p:txBody>
+          <a:bodyPr/>
+          <a:p/>
+        </p:txBody>
       </p:sp>
       <p:sp>
         <p:nvSpPr>
@@ -10522,6 +10676,10 @@
           </a:solidFill>
           <a:ln/>
         </p:spPr>
+        <p:txBody>
+          <a:bodyPr/>
+          <a:p/>
+        </p:txBody>
       </p:sp>
       <p:sp>
         <p:nvSpPr>
@@ -11805,6 +11963,10 @@
             <a:prstDash val="solid"/>
           </a:ln>
         </p:spPr>
+        <p:txBody>
+          <a:bodyPr/>
+          <a:p/>
+        </p:txBody>
       </p:sp>
       <p:sp>
         <p:nvSpPr>
@@ -11910,6 +12072,10 @@
           </a:solidFill>
           <a:ln/>
         </p:spPr>
+        <p:txBody>
+          <a:bodyPr/>
+          <a:p/>
+        </p:txBody>
       </p:sp>
       <p:sp>
         <p:nvSpPr>
@@ -11930,6 +12096,10 @@
           </a:solidFill>
           <a:ln/>
         </p:spPr>
+        <p:txBody>
+          <a:bodyPr/>
+          <a:p/>
+        </p:txBody>
       </p:sp>
       <p:sp>
         <p:nvSpPr>
@@ -12120,6 +12290,10 @@
             </a:outerShdw>
           </a:effectLst>
         </p:spPr>
+        <p:txBody>
+          <a:bodyPr/>
+          <a:p/>
+        </p:txBody>
       </p:sp>
       <p:sp>
         <p:nvSpPr>
@@ -12140,6 +12314,10 @@
           </a:solidFill>
           <a:ln/>
         </p:spPr>
+        <p:txBody>
+          <a:bodyPr/>
+          <a:p/>
+        </p:txBody>
       </p:sp>
       <p:sp>
         <p:nvSpPr>
@@ -12160,6 +12338,10 @@
           </a:solidFill>
           <a:ln/>
         </p:spPr>
+        <p:txBody>
+          <a:bodyPr/>
+          <a:p/>
+        </p:txBody>
       </p:sp>
       <p:sp>
         <p:nvSpPr>
@@ -12314,6 +12496,10 @@
             </a:outerShdw>
           </a:effectLst>
         </p:spPr>
+        <p:txBody>
+          <a:bodyPr/>
+          <a:p/>
+        </p:txBody>
       </p:sp>
       <p:sp>
         <p:nvSpPr>
@@ -12334,6 +12520,10 @@
           </a:solidFill>
           <a:ln/>
         </p:spPr>
+        <p:txBody>
+          <a:bodyPr/>
+          <a:p/>
+        </p:txBody>
       </p:sp>
       <p:sp>
         <p:nvSpPr>
@@ -12354,6 +12544,10 @@
           </a:solidFill>
           <a:ln/>
         </p:spPr>
+        <p:txBody>
+          <a:bodyPr/>
+          <a:p/>
+        </p:txBody>
       </p:sp>
       <p:sp>
         <p:nvSpPr>
@@ -12508,6 +12702,10 @@
             </a:outerShdw>
           </a:effectLst>
         </p:spPr>
+        <p:txBody>
+          <a:bodyPr/>
+          <a:p/>
+        </p:txBody>
       </p:sp>
       <p:sp>
         <p:nvSpPr>
@@ -12528,6 +12726,10 @@
           </a:solidFill>
           <a:ln/>
         </p:spPr>
+        <p:txBody>
+          <a:bodyPr/>
+          <a:p/>
+        </p:txBody>
       </p:sp>
       <p:sp>
         <p:nvSpPr>
@@ -12548,6 +12750,10 @@
           </a:solidFill>
           <a:ln/>
         </p:spPr>
+        <p:txBody>
+          <a:bodyPr/>
+          <a:p/>
+        </p:txBody>
       </p:sp>
       <p:sp>
         <p:nvSpPr>
@@ -12621,7 +12827,7 @@
                 <a:ea typeface="微软雅黑" pitchFamily="34" charset="-122"/>
                 <a:cs typeface="微软雅黑" pitchFamily="34" charset="-120"/>
               </a:rPr>
-              <a:t>RDS / MSE 白名单要放行 SAE 的 VSwitch 网段</a:t>
+              <a:t>RDS / MSE 白名单要放行 SAE 的 虚拟交换机 网段</a:t>
             </a:r>
             <a:endParaRPr lang="en-US" sz="1600" dirty="0"/>
           </a:p>
@@ -12663,7 +12869,7 @@
                 <a:ea typeface="微软雅黑" pitchFamily="34" charset="-122"/>
                 <a:cs typeface="微软雅黑" pitchFamily="34" charset="-120"/>
               </a:rPr>
-              <a:t>白名单是独立于 VPC 的访问控制：同 VPC 网络通，但源 IP 不在白名单仍被拒。SAE 实例 IP 从 VSwitch 网段动态分配、会变，把该 VSwitch 整个网段补进 RDS 和 MSE 白名单，否则启动报连不上。</a:t>
+              <a:t>白名单是独立于 VPC 的访问控制：同 VPC 网络通，但源 IP 不在白名单仍被拒。SAE 实例 IP 从 虚拟交换机 网段动态分配、会变，把该 虚拟交换机 整个网段补进 RDS 和 MSE 白名单，否则启动报连不上。</a:t>
             </a:r>
             <a:endParaRPr lang="en-US" sz="1300" dirty="0"/>
           </a:p>
@@ -12759,6 +12965,10 @@
           </a:solidFill>
           <a:ln/>
         </p:spPr>
+        <p:txBody>
+          <a:bodyPr/>
+          <a:p/>
+        </p:txBody>
       </p:sp>
       <p:sp>
         <p:nvSpPr>
@@ -12779,6 +12989,10 @@
           </a:solidFill>
           <a:ln/>
         </p:spPr>
+        <p:txBody>
+          <a:bodyPr/>
+          <a:p/>
+        </p:txBody>
       </p:sp>
       <p:sp>
         <p:nvSpPr>
@@ -13008,6 +13222,10 @@
             </a:outerShdw>
           </a:effectLst>
         </p:spPr>
+        <p:txBody>
+          <a:bodyPr/>
+          <a:p/>
+        </p:txBody>
       </p:sp>
       <p:sp>
         <p:nvSpPr>
@@ -13256,46 +13474,40 @@
             <a:prstDash val="solid"/>
           </a:ln>
         </p:spPr>
-      </p:sp>
-      <p:sp>
-        <p:nvSpPr>
-          <p:cNvPr id="15" name="Text 13"/>
-          <p:cNvSpPr/>
-          <p:nvPr/>
-        </p:nvSpPr>
-        <p:spPr>
-          <a:xfrm>
-            <a:off x="6858000" y="1874520"/>
-            <a:ext cx="4572000" cy="4206240"/>
-          </a:xfrm>
-          <a:prstGeom prst="rect">
-            <a:avLst/>
-          </a:prstGeom>
-          <a:noFill/>
-          <a:ln/>
-        </p:spPr>
-        <p:txBody>
-          <a:bodyPr wrap="square" lIns="0" tIns="0" rIns="0" bIns="0" rtlCol="0" anchor="ctr"/>
-          <a:lstStyle/>
-          <a:p>
-            <a:pPr algn="ctr" indent="0" marL="0">
-              <a:buNone/>
-            </a:pPr>
-            <a:r>
-              <a:rPr lang="en-US" sz="4600" dirty="0">
-                <a:solidFill>
-                  <a:srgbClr val="9FB0C2"/>
-                </a:solidFill>
-                <a:latin typeface="微软雅黑" pitchFamily="34" charset="0"/>
-                <a:ea typeface="微软雅黑" pitchFamily="34" charset="-122"/>
-                <a:cs typeface="微软雅黑" pitchFamily="34" charset="-120"/>
-              </a:rPr>
-              <a:t>📷</a:t>
-            </a:r>
-            <a:endParaRPr lang="en-US" sz="4600" dirty="0"/>
-          </a:p>
-        </p:txBody>
-      </p:sp>
+        <p:txBody>
+          <a:bodyPr/>
+          <a:p/>
+        </p:txBody>
+      </p:sp>
+      <p:pic>
+        <p:nvPicPr>
+          <p:cNvPr id="16" name="Picture 15" descr="p805171.png"/>
+          <p:cNvPicPr>
+            <a:picLocks noChangeAspect="1"/>
+          </p:cNvPicPr>
+          <p:nvPr/>
+        </p:nvPicPr>
+        <p:blipFill>
+          <a:blip r:embed="rId3"/>
+          <a:stretch>
+            <a:fillRect/>
+          </a:stretch>
+        </p:blipFill>
+        <p:spPr>
+          <a:xfrm>
+            <a:off x="6858000" y="2876790"/>
+            <a:ext cx="4572000" cy="2201700"/>
+          </a:xfrm>
+          <a:prstGeom prst="rect">
+            <a:avLst/>
+          </a:prstGeom>
+          <a:ln w="9525">
+            <a:solidFill>
+              <a:srgbClr val="CCCCCC"/>
+            </a:solidFill>
+          </a:ln>
+        </p:spPr>
+      </p:pic>
     </p:spTree>
   </p:cSld>
   <p:clrMapOvr>
@@ -13347,6 +13559,10 @@
           </a:solidFill>
           <a:ln/>
         </p:spPr>
+        <p:txBody>
+          <a:bodyPr/>
+          <a:p/>
+        </p:txBody>
       </p:sp>
       <p:sp>
         <p:nvSpPr>
@@ -13367,6 +13583,10 @@
           </a:solidFill>
           <a:ln/>
         </p:spPr>
+        <p:txBody>
+          <a:bodyPr/>
+          <a:p/>
+        </p:txBody>
       </p:sp>
       <p:sp>
         <p:nvSpPr>
@@ -13440,7 +13660,7 @@
                 <a:ea typeface="微软雅黑" pitchFamily="34" charset="-122"/>
                 <a:cs typeface="微软雅黑" pitchFamily="34" charset="-120"/>
               </a:rPr>
-              <a:t>③ RDS + MSE 白名单加 SAE 的 VSwitch 网段</a:t>
+              <a:t>③ RDS + MSE 白名单加 SAE 的 虚拟交换机 网段</a:t>
             </a:r>
             <a:endParaRPr lang="en-US" sz="2800" dirty="0"/>
           </a:p>
@@ -13596,6 +13816,10 @@
             </a:outerShdw>
           </a:effectLst>
         </p:spPr>
+        <p:txBody>
+          <a:bodyPr/>
+          <a:p/>
+        </p:txBody>
       </p:sp>
       <p:sp>
         <p:nvSpPr>
@@ -13616,6 +13840,10 @@
           </a:solidFill>
           <a:ln/>
         </p:spPr>
+        <p:txBody>
+          <a:bodyPr/>
+          <a:p/>
+        </p:txBody>
       </p:sp>
       <p:sp>
         <p:nvSpPr>
@@ -13689,7 +13917,7 @@
                 <a:ea typeface="微软雅黑" pitchFamily="34" charset="-122"/>
                 <a:cs typeface="微软雅黑" pitchFamily="34" charset="-120"/>
               </a:rPr>
-              <a:t>先查 SAE 要用的 VSwitch 网段</a:t>
+              <a:t>先查 SAE 要用的 虚拟交换机（VSwitch）网段</a:t>
             </a:r>
             <a:endParaRPr lang="en-US" sz="1600" dirty="0"/>
           </a:p>
@@ -13728,7 +13956,7 @@
                 <a:ea typeface="微软雅黑" pitchFamily="34" charset="-122"/>
                 <a:cs typeface="微软雅黑" pitchFamily="34" charset="-120"/>
               </a:rPr>
-              <a:t>VPC 控制台 → 交换机 → 在 ECS 同 VPC 里挑一个可用 IP ≥ 64 的 VSwitch → 复制它的 CIDR 网段（形如 172.16.1.0/24）。后面部署应用也选这个 VSwitch。</a:t>
+              <a:t>VPC 控制台 → 交换机 → 在 ECS 同 VPC 里挑一个可用 IP ≥ 64 的 虚拟交换机 → 复制它的 CIDR 网段（形如 172.16.1.0/24）。后面部署应用也选这个 虚拟交换机。</a:t>
             </a:r>
             <a:endParaRPr lang="en-US" sz="1300" dirty="0"/>
           </a:p>
@@ -13767,6 +13995,10 @@
             </a:outerShdw>
           </a:effectLst>
         </p:spPr>
+        <p:txBody>
+          <a:bodyPr/>
+          <a:p/>
+        </p:txBody>
       </p:sp>
       <p:sp>
         <p:nvSpPr>
@@ -13874,7 +14106,7 @@
                   <a:srgbClr val="1C2B3A"/>
                 </a:solidFill>
               </a:rPr>
-              <a:t>逗号追加 VSwitch 网段 → 确定</a:t>
+              <a:t>逗号追加 虚拟交换机 网段 → 确定</a:t>
             </a:r>
             <a:endParaRPr lang="en-US" sz="1250" dirty="0"/>
           </a:p>
@@ -13913,6 +14145,10 @@
             </a:outerShdw>
           </a:effectLst>
         </p:spPr>
+        <p:txBody>
+          <a:bodyPr/>
+          <a:p/>
+        </p:txBody>
       </p:sp>
       <p:sp>
         <p:nvSpPr>
@@ -14023,7 +14259,7 @@
                   <a:srgbClr val="1C2B3A"/>
                 </a:solidFill>
               </a:rPr>
-              <a:t>追加同一个 VSwitch 网段 → 确定</a:t>
+              <a:t>追加同一个 虚拟交换机 网段 → 确定</a:t>
             </a:r>
             <a:endParaRPr lang="en-US" sz="1250" dirty="0"/>
           </a:p>
@@ -14069,46 +14305,40 @@
             <a:prstDash val="solid"/>
           </a:ln>
         </p:spPr>
-      </p:sp>
-      <p:sp>
-        <p:nvSpPr>
-          <p:cNvPr id="21" name="Text 19"/>
-          <p:cNvSpPr/>
-          <p:nvPr/>
-        </p:nvSpPr>
-        <p:spPr>
-          <a:xfrm>
-            <a:off x="7909560" y="3291840"/>
-            <a:ext cx="3520440" cy="2697480"/>
-          </a:xfrm>
-          <a:prstGeom prst="rect">
-            <a:avLst/>
-          </a:prstGeom>
-          <a:noFill/>
-          <a:ln/>
-        </p:spPr>
-        <p:txBody>
-          <a:bodyPr wrap="square" lIns="0" tIns="0" rIns="0" bIns="0" rtlCol="0" anchor="ctr"/>
-          <a:lstStyle/>
-          <a:p>
-            <a:pPr algn="ctr" indent="0" marL="0">
-              <a:buNone/>
-            </a:pPr>
-            <a:r>
-              <a:rPr lang="en-US" sz="4600" dirty="0">
-                <a:solidFill>
-                  <a:srgbClr val="9FB0C2"/>
-                </a:solidFill>
-                <a:latin typeface="微软雅黑" pitchFamily="34" charset="0"/>
-                <a:ea typeface="微软雅黑" pitchFamily="34" charset="-122"/>
-                <a:cs typeface="微软雅黑" pitchFamily="34" charset="-120"/>
-              </a:rPr>
-              <a:t>📷</a:t>
-            </a:r>
-            <a:endParaRPr lang="en-US" sz="4600" dirty="0"/>
-          </a:p>
-        </p:txBody>
-      </p:sp>
+        <p:txBody>
+          <a:bodyPr/>
+          <a:p/>
+        </p:txBody>
+      </p:sp>
+      <p:pic>
+        <p:nvPicPr>
+          <p:cNvPr id="22" name="Picture 21" descr="p980078.png"/>
+          <p:cNvPicPr>
+            <a:picLocks noChangeAspect="1"/>
+          </p:cNvPicPr>
+          <p:nvPr/>
+        </p:nvPicPr>
+        <p:blipFill>
+          <a:blip r:embed="rId3"/>
+          <a:stretch>
+            <a:fillRect/>
+          </a:stretch>
+        </p:blipFill>
+        <p:spPr>
+          <a:xfrm>
+            <a:off x="7909560" y="3726770"/>
+            <a:ext cx="3520440" cy="1827619"/>
+          </a:xfrm>
+          <a:prstGeom prst="rect">
+            <a:avLst/>
+          </a:prstGeom>
+          <a:ln w="9525">
+            <a:solidFill>
+              <a:srgbClr val="CCCCCC"/>
+            </a:solidFill>
+          </a:ln>
+        </p:spPr>
+      </p:pic>
     </p:spTree>
   </p:cSld>
   <p:clrMapOvr>
@@ -14160,6 +14390,10 @@
           </a:solidFill>
           <a:ln/>
         </p:spPr>
+        <p:txBody>
+          <a:bodyPr/>
+          <a:p/>
+        </p:txBody>
       </p:sp>
       <p:sp>
         <p:nvSpPr>
@@ -14180,6 +14414,10 @@
           </a:solidFill>
           <a:ln/>
         </p:spPr>
+        <p:txBody>
+          <a:bodyPr/>
+          <a:p/>
+        </p:txBody>
       </p:sp>
       <p:sp>
         <p:nvSpPr>
@@ -14370,6 +14608,10 @@
             </a:outerShdw>
           </a:effectLst>
         </p:spPr>
+        <p:txBody>
+          <a:bodyPr/>
+          <a:p/>
+        </p:txBody>
       </p:sp>
       <p:sp>
         <p:nvSpPr>
@@ -14563,6 +14805,10 @@
             </a:outerShdw>
           </a:effectLst>
         </p:spPr>
+        <p:txBody>
+          <a:bodyPr/>
+          <a:p/>
+        </p:txBody>
       </p:sp>
       <p:sp>
         <p:nvSpPr>
@@ -14629,6 +14875,10 @@
             <a:prstDash val="solid"/>
           </a:ln>
         </p:spPr>
+        <p:txBody>
+          <a:bodyPr/>
+          <a:p/>
+        </p:txBody>
       </p:sp>
       <p:sp>
         <p:nvSpPr>
@@ -14759,6 +15009,10 @@
             <a:tailEnd type="triangle"/>
           </a:ln>
         </p:spPr>
+        <p:txBody>
+          <a:bodyPr/>
+          <a:p/>
+        </p:txBody>
       </p:sp>
       <p:sp>
         <p:nvSpPr>
@@ -14786,6 +15040,10 @@
             <a:prstDash val="solid"/>
           </a:ln>
         </p:spPr>
+        <p:txBody>
+          <a:bodyPr/>
+          <a:p/>
+        </p:txBody>
       </p:sp>
       <p:sp>
         <p:nvSpPr>
@@ -14852,6 +15110,10 @@
             <a:prstDash val="solid"/>
           </a:ln>
         </p:spPr>
+        <p:txBody>
+          <a:bodyPr/>
+          <a:p/>
+        </p:txBody>
       </p:sp>
       <p:sp>
         <p:nvSpPr>
@@ -14918,6 +15180,10 @@
             <a:prstDash val="solid"/>
           </a:ln>
         </p:spPr>
+        <p:txBody>
+          <a:bodyPr/>
+          <a:p/>
+        </p:txBody>
       </p:sp>
       <p:sp>
         <p:nvSpPr>
@@ -15087,6 +15353,10 @@
           </a:solidFill>
           <a:ln/>
         </p:spPr>
+        <p:txBody>
+          <a:bodyPr/>
+          <a:p/>
+        </p:txBody>
       </p:sp>
       <p:sp>
         <p:nvSpPr>
@@ -15107,6 +15377,10 @@
           </a:solidFill>
           <a:ln/>
         </p:spPr>
+        <p:txBody>
+          <a:bodyPr/>
+          <a:p/>
+        </p:txBody>
       </p:sp>
       <p:sp>
         <p:nvSpPr>
@@ -15300,7 +15574,7 @@
                 <a:ea typeface="微软雅黑" pitchFamily="34" charset="-122"/>
                 <a:cs typeface="微软雅黑" pitchFamily="34" charset="-120"/>
               </a:rPr>
-              <a:t>创建应用：名称 userorder-sae · 命名空间 coffee-prod-sae · VPC 同 ECS · VSwitch 选已加白名单那个 · 实例数 1 · 0.5C/1G · 部署 JDK17+jar · 高级设置→服务注册发现选「MSE Nacos 专业版」→选你的实例（3 个应用都要选）</a:t>
+              <a:t>创建应用：名称 userorder-sae · 命名空间 coffee-prod-sae · VPC 同 ECS · 虚拟交换机 选已加白名单那个 · 实例数 1 · 0.5C/1G · 部署 JDK17+jar · 高级设置→服务注册发现选「MSE Nacos 专业版」→选你的实例（3 个应用都要选）</a:t>
             </a:r>
             <a:endParaRPr lang="en-US" sz="1200" dirty="0"/>
           </a:p>
@@ -16205,44 +16479,9 @@
             <a:prstDash val="solid"/>
           </a:ln>
         </p:spPr>
-      </p:sp>
-      <p:sp>
-        <p:nvSpPr>
-          <p:cNvPr id="12" name="Text 9"/>
-          <p:cNvSpPr/>
-          <p:nvPr/>
-        </p:nvSpPr>
-        <p:spPr>
-          <a:xfrm>
-            <a:off x="7726680" y="2468880"/>
-            <a:ext cx="3703320" cy="2834640"/>
-          </a:xfrm>
-          <a:prstGeom prst="rect">
-            <a:avLst/>
-          </a:prstGeom>
-          <a:noFill/>
-          <a:ln/>
-        </p:spPr>
-        <p:txBody>
-          <a:bodyPr wrap="square" lIns="0" tIns="0" rIns="0" bIns="0" rtlCol="0" anchor="ctr"/>
-          <a:lstStyle/>
-          <a:p>
-            <a:pPr algn="ctr" indent="0" marL="0">
-              <a:buNone/>
-            </a:pPr>
-            <a:r>
-              <a:rPr lang="en-US" sz="4600" dirty="0">
-                <a:solidFill>
-                  <a:srgbClr val="9FB0C2"/>
-                </a:solidFill>
-                <a:latin typeface="微软雅黑" pitchFamily="34" charset="0"/>
-                <a:ea typeface="微软雅黑" pitchFamily="34" charset="-122"/>
-                <a:cs typeface="微软雅黑" pitchFamily="34" charset="-120"/>
-              </a:rPr>
-              <a:t>📷</a:t>
-            </a:r>
-            <a:endParaRPr lang="en-US" sz="4600" dirty="0"/>
-          </a:p>
+        <p:txBody>
+          <a:bodyPr/>
+          <a:p/>
         </p:txBody>
       </p:sp>
       <p:sp>
@@ -16271,6 +16510,10 @@
             <a:prstDash val="solid"/>
           </a:ln>
         </p:spPr>
+        <p:txBody>
+          <a:bodyPr/>
+          <a:p/>
+        </p:txBody>
       </p:sp>
       <p:sp>
         <p:nvSpPr>
@@ -16339,6 +16582,35 @@
           </a:p>
         </p:txBody>
       </p:sp>
+      <p:pic>
+        <p:nvPicPr>
+          <p:cNvPr id="22" name="Picture 21" descr="p914321.png"/>
+          <p:cNvPicPr>
+            <a:picLocks noChangeAspect="1"/>
+          </p:cNvPicPr>
+          <p:nvPr/>
+        </p:nvPicPr>
+        <p:blipFill>
+          <a:blip r:embed="rId3"/>
+          <a:stretch>
+            <a:fillRect/>
+          </a:stretch>
+        </p:blipFill>
+        <p:spPr>
+          <a:xfrm>
+            <a:off x="7726680" y="3420254"/>
+            <a:ext cx="3703320" cy="931892"/>
+          </a:xfrm>
+          <a:prstGeom prst="rect">
+            <a:avLst/>
+          </a:prstGeom>
+          <a:ln w="9525">
+            <a:solidFill>
+              <a:srgbClr val="CCCCCC"/>
+            </a:solidFill>
+          </a:ln>
+        </p:spPr>
+      </p:pic>
     </p:spTree>
   </p:cSld>
   <p:clrMapOvr>
@@ -16390,6 +16662,10 @@
           </a:solidFill>
           <a:ln/>
         </p:spPr>
+        <p:txBody>
+          <a:bodyPr/>
+          <a:p/>
+        </p:txBody>
       </p:sp>
       <p:sp>
         <p:nvSpPr>
@@ -16410,6 +16686,10 @@
           </a:solidFill>
           <a:ln/>
         </p:spPr>
+        <p:txBody>
+          <a:bodyPr/>
+          <a:p/>
+        </p:txBody>
       </p:sp>
       <p:sp>
         <p:nvSpPr>
@@ -16600,6 +16880,10 @@
             </a:outerShdw>
           </a:effectLst>
         </p:spPr>
+        <p:txBody>
+          <a:bodyPr/>
+          <a:p/>
+        </p:txBody>
       </p:sp>
       <p:sp>
         <p:nvSpPr>
@@ -16764,6 +17048,10 @@
             </a:outerShdw>
           </a:effectLst>
         </p:spPr>
+        <p:txBody>
+          <a:bodyPr/>
+          <a:p/>
+        </p:txBody>
       </p:sp>
       <p:sp>
         <p:nvSpPr>
@@ -16903,44 +17191,9 @@
             <a:prstDash val="solid"/>
           </a:ln>
         </p:spPr>
-      </p:sp>
-      <p:sp>
-        <p:nvSpPr>
-          <p:cNvPr id="15" name="Text 13"/>
-          <p:cNvSpPr/>
-          <p:nvPr/>
-        </p:nvSpPr>
-        <p:spPr>
-          <a:xfrm>
-            <a:off x="7909560" y="1417320"/>
-            <a:ext cx="3520440" cy="2194560"/>
-          </a:xfrm>
-          <a:prstGeom prst="rect">
-            <a:avLst/>
-          </a:prstGeom>
-          <a:noFill/>
-          <a:ln/>
-        </p:spPr>
-        <p:txBody>
-          <a:bodyPr wrap="square" lIns="0" tIns="0" rIns="0" bIns="0" rtlCol="0" anchor="ctr"/>
-          <a:lstStyle/>
-          <a:p>
-            <a:pPr algn="ctr" indent="0" marL="0">
-              <a:buNone/>
-            </a:pPr>
-            <a:r>
-              <a:rPr lang="en-US" sz="4600" dirty="0">
-                <a:solidFill>
-                  <a:srgbClr val="9FB0C2"/>
-                </a:solidFill>
-                <a:latin typeface="微软雅黑" pitchFamily="34" charset="0"/>
-                <a:ea typeface="微软雅黑" pitchFamily="34" charset="-122"/>
-                <a:cs typeface="微软雅黑" pitchFamily="34" charset="-120"/>
-              </a:rPr>
-              <a:t>📷</a:t>
-            </a:r>
-            <a:endParaRPr lang="en-US" sz="4600" dirty="0"/>
-          </a:p>
+        <p:txBody>
+          <a:bodyPr/>
+          <a:p/>
         </p:txBody>
       </p:sp>
       <p:sp>
@@ -16976,6 +17229,10 @@
             </a:outerShdw>
           </a:effectLst>
         </p:spPr>
+        <p:txBody>
+          <a:bodyPr/>
+          <a:p/>
+        </p:txBody>
       </p:sp>
       <p:sp>
         <p:nvSpPr>
@@ -17097,6 +17354,35 @@
           </a:p>
         </p:txBody>
       </p:sp>
+      <p:pic>
+        <p:nvPicPr>
+          <p:cNvPr id="19" name="Picture 18" descr="p925062.png"/>
+          <p:cNvPicPr>
+            <a:picLocks noChangeAspect="1"/>
+          </p:cNvPicPr>
+          <p:nvPr/>
+        </p:nvPicPr>
+        <p:blipFill>
+          <a:blip r:embed="rId3"/>
+          <a:stretch>
+            <a:fillRect/>
+          </a:stretch>
+        </p:blipFill>
+        <p:spPr>
+          <a:xfrm>
+            <a:off x="8367795" y="1417320"/>
+            <a:ext cx="2603970" cy="2194560"/>
+          </a:xfrm>
+          <a:prstGeom prst="rect">
+            <a:avLst/>
+          </a:prstGeom>
+          <a:ln w="9525">
+            <a:solidFill>
+              <a:srgbClr val="CCCCCC"/>
+            </a:solidFill>
+          </a:ln>
+        </p:spPr>
+      </p:pic>
     </p:spTree>
   </p:cSld>
   <p:clrMapOvr>
@@ -17148,6 +17434,10 @@
           </a:solidFill>
           <a:ln/>
         </p:spPr>
+        <p:txBody>
+          <a:bodyPr/>
+          <a:p/>
+        </p:txBody>
       </p:sp>
       <p:sp>
         <p:nvSpPr>
@@ -17168,6 +17458,10 @@
           </a:solidFill>
           <a:ln/>
         </p:spPr>
+        <p:txBody>
+          <a:bodyPr/>
+          <a:p/>
+        </p:txBody>
       </p:sp>
       <p:sp>
         <p:nvSpPr>
@@ -17400,6 +17694,10 @@
             </a:outerShdw>
           </a:effectLst>
         </p:spPr>
+        <p:txBody>
+          <a:bodyPr/>
+          <a:p/>
+        </p:txBody>
       </p:sp>
       <p:sp>
         <p:nvSpPr>
@@ -17575,44 +17873,9 @@
             <a:prstDash val="solid"/>
           </a:ln>
         </p:spPr>
-      </p:sp>
-      <p:sp>
-        <p:nvSpPr>
-          <p:cNvPr id="13" name="Text 11"/>
-          <p:cNvSpPr/>
-          <p:nvPr/>
-        </p:nvSpPr>
-        <p:spPr>
-          <a:xfrm>
-            <a:off x="7040880" y="1874520"/>
-            <a:ext cx="4389120" cy="3886200"/>
-          </a:xfrm>
-          <a:prstGeom prst="rect">
-            <a:avLst/>
-          </a:prstGeom>
-          <a:noFill/>
-          <a:ln/>
-        </p:spPr>
-        <p:txBody>
-          <a:bodyPr wrap="square" lIns="0" tIns="0" rIns="0" bIns="0" rtlCol="0" anchor="ctr"/>
-          <a:lstStyle/>
-          <a:p>
-            <a:pPr algn="ctr" indent="0" marL="0">
-              <a:buNone/>
-            </a:pPr>
-            <a:r>
-              <a:rPr lang="en-US" sz="4600" dirty="0">
-                <a:solidFill>
-                  <a:srgbClr val="9FB0C2"/>
-                </a:solidFill>
-                <a:latin typeface="微软雅黑" pitchFamily="34" charset="0"/>
-                <a:ea typeface="微软雅黑" pitchFamily="34" charset="-122"/>
-                <a:cs typeface="微软雅黑" pitchFamily="34" charset="-120"/>
-              </a:rPr>
-              <a:t>📷</a:t>
-            </a:r>
-            <a:endParaRPr lang="en-US" sz="4600" dirty="0"/>
-          </a:p>
+        <p:txBody>
+          <a:bodyPr/>
+          <a:p/>
         </p:txBody>
       </p:sp>
       <p:sp>
@@ -17641,6 +17904,10 @@
             <a:prstDash val="solid"/>
           </a:ln>
         </p:spPr>
+        <p:txBody>
+          <a:bodyPr/>
+          <a:p/>
+        </p:txBody>
       </p:sp>
       <p:sp>
         <p:nvSpPr>
@@ -17695,6 +17962,35 @@
           </a:p>
         </p:txBody>
       </p:sp>
+      <p:pic>
+        <p:nvPicPr>
+          <p:cNvPr id="16" name="Picture 15" descr="p881134.png"/>
+          <p:cNvPicPr>
+            <a:picLocks noChangeAspect="1"/>
+          </p:cNvPicPr>
+          <p:nvPr/>
+        </p:nvPicPr>
+        <p:blipFill>
+          <a:blip r:embed="rId3"/>
+          <a:stretch>
+            <a:fillRect/>
+          </a:stretch>
+        </p:blipFill>
+        <p:spPr>
+          <a:xfrm>
+            <a:off x="7040880" y="2490047"/>
+            <a:ext cx="4389120" cy="2655146"/>
+          </a:xfrm>
+          <a:prstGeom prst="rect">
+            <a:avLst/>
+          </a:prstGeom>
+          <a:ln w="9525">
+            <a:solidFill>
+              <a:srgbClr val="CCCCCC"/>
+            </a:solidFill>
+          </a:ln>
+        </p:spPr>
+      </p:pic>
     </p:spTree>
   </p:cSld>
   <p:clrMapOvr>
@@ -17746,6 +18042,10 @@
           </a:solidFill>
           <a:ln/>
         </p:spPr>
+        <p:txBody>
+          <a:bodyPr/>
+          <a:p/>
+        </p:txBody>
       </p:sp>
       <p:sp>
         <p:nvSpPr>
@@ -17766,6 +18066,10 @@
           </a:solidFill>
           <a:ln/>
         </p:spPr>
+        <p:txBody>
+          <a:bodyPr/>
+          <a:p/>
+        </p:txBody>
       </p:sp>
       <p:sp>
         <p:nvSpPr>
@@ -17956,6 +18260,10 @@
             </a:outerShdw>
           </a:effectLst>
         </p:spPr>
+        <p:txBody>
+          <a:bodyPr/>
+          <a:p/>
+        </p:txBody>
       </p:sp>
       <p:sp>
         <p:nvSpPr>
@@ -18104,44 +18412,9 @@
             <a:prstDash val="solid"/>
           </a:ln>
         </p:spPr>
-      </p:sp>
-      <p:sp>
-        <p:nvSpPr>
-          <p:cNvPr id="12" name="Text 10"/>
-          <p:cNvSpPr/>
-          <p:nvPr/>
-        </p:nvSpPr>
-        <p:spPr>
-          <a:xfrm>
-            <a:off x="6812280" y="1417320"/>
-            <a:ext cx="4617720" cy="2103120"/>
-          </a:xfrm>
-          <a:prstGeom prst="rect">
-            <a:avLst/>
-          </a:prstGeom>
-          <a:noFill/>
-          <a:ln/>
-        </p:spPr>
-        <p:txBody>
-          <a:bodyPr wrap="square" lIns="0" tIns="0" rIns="0" bIns="0" rtlCol="0" anchor="ctr"/>
-          <a:lstStyle/>
-          <a:p>
-            <a:pPr algn="ctr" indent="0" marL="0">
-              <a:buNone/>
-            </a:pPr>
-            <a:r>
-              <a:rPr lang="en-US" sz="4600" dirty="0">
-                <a:solidFill>
-                  <a:srgbClr val="9FB0C2"/>
-                </a:solidFill>
-                <a:latin typeface="微软雅黑" pitchFamily="34" charset="0"/>
-                <a:ea typeface="微软雅黑" pitchFamily="34" charset="-122"/>
-                <a:cs typeface="微软雅黑" pitchFamily="34" charset="-120"/>
-              </a:rPr>
-              <a:t>📷</a:t>
-            </a:r>
-            <a:endParaRPr lang="en-US" sz="4600" dirty="0"/>
-          </a:p>
+        <p:txBody>
+          <a:bodyPr/>
+          <a:p/>
         </p:txBody>
       </p:sp>
       <p:sp>
@@ -18177,6 +18450,10 @@
             </a:outerShdw>
           </a:effectLst>
         </p:spPr>
+        <p:txBody>
+          <a:bodyPr/>
+          <a:p/>
+        </p:txBody>
       </p:sp>
       <p:sp>
         <p:nvSpPr>
@@ -18197,6 +18474,10 @@
           </a:solidFill>
           <a:ln/>
         </p:spPr>
+        <p:txBody>
+          <a:bodyPr/>
+          <a:p/>
+        </p:txBody>
       </p:sp>
       <p:sp>
         <p:nvSpPr>
@@ -18270,7 +18551,7 @@
                 <a:ea typeface="微软雅黑" pitchFamily="34" charset="-122"/>
                 <a:cs typeface="微软雅黑" pitchFamily="34" charset="-120"/>
               </a:rPr>
-              <a:t>99% 是 RDS 白名单没加 SAE 的 VSwitch 网段 → 回第 ③ 步补上。</a:t>
+              <a:t>99% 是 RDS 白名单没加 SAE 的 虚拟交换机 网段 → 回第 ③ 步补上。</a:t>
             </a:r>
             <a:endParaRPr lang="en-US" sz="1250" dirty="0"/>
           </a:p>
@@ -18309,6 +18590,10 @@
             </a:outerShdw>
           </a:effectLst>
         </p:spPr>
+        <p:txBody>
+          <a:bodyPr/>
+          <a:p/>
+        </p:txBody>
       </p:sp>
       <p:sp>
         <p:nvSpPr>
@@ -18329,6 +18614,10 @@
           </a:solidFill>
           <a:ln/>
         </p:spPr>
+        <p:txBody>
+          <a:bodyPr/>
+          <a:p/>
+        </p:txBody>
       </p:sp>
       <p:sp>
         <p:nvSpPr>
@@ -18402,7 +18691,7 @@
                 <a:ea typeface="微软雅黑" pitchFamily="34" charset="-122"/>
                 <a:cs typeface="微软雅黑" pitchFamily="34" charset="-120"/>
               </a:rPr>
-              <a:t>同根因：MSE 内网白名单没加 VSwitch 网段 → 回第 ③ 步补上。</a:t>
+              <a:t>同根因：MSE 内网白名单没加 虚拟交换机 网段 → 回第 ③ 步补上。</a:t>
             </a:r>
             <a:endParaRPr lang="en-US" sz="1250" dirty="0"/>
           </a:p>
@@ -18441,6 +18730,10 @@
             </a:outerShdw>
           </a:effectLst>
         </p:spPr>
+        <p:txBody>
+          <a:bodyPr/>
+          <a:p/>
+        </p:txBody>
       </p:sp>
       <p:sp>
         <p:nvSpPr>
@@ -18461,6 +18754,10 @@
           </a:solidFill>
           <a:ln/>
         </p:spPr>
+        <p:txBody>
+          <a:bodyPr/>
+          <a:p/>
+        </p:txBody>
       </p:sp>
       <p:sp>
         <p:nvSpPr>
@@ -18540,6 +18837,35 @@
           </a:p>
         </p:txBody>
       </p:sp>
+      <p:pic>
+        <p:nvPicPr>
+          <p:cNvPr id="25" name="Picture 24" descr="p365561.png"/>
+          <p:cNvPicPr>
+            <a:picLocks noChangeAspect="1"/>
+          </p:cNvPicPr>
+          <p:nvPr/>
+        </p:nvPicPr>
+        <p:blipFill>
+          <a:blip r:embed="rId3"/>
+          <a:stretch>
+            <a:fillRect/>
+          </a:stretch>
+        </p:blipFill>
+        <p:spPr>
+          <a:xfrm>
+            <a:off x="6812280" y="1633883"/>
+            <a:ext cx="4617720" cy="1669993"/>
+          </a:xfrm>
+          <a:prstGeom prst="rect">
+            <a:avLst/>
+          </a:prstGeom>
+          <a:ln w="9525">
+            <a:solidFill>
+              <a:srgbClr val="CCCCCC"/>
+            </a:solidFill>
+          </a:ln>
+        </p:spPr>
+      </p:pic>
     </p:spTree>
   </p:cSld>
   <p:clrMapOvr>
@@ -18591,6 +18917,10 @@
           </a:solidFill>
           <a:ln/>
         </p:spPr>
+        <p:txBody>
+          <a:bodyPr/>
+          <a:p/>
+        </p:txBody>
       </p:sp>
       <p:sp>
         <p:nvSpPr>
@@ -18611,6 +18941,10 @@
           </a:solidFill>
           <a:ln/>
         </p:spPr>
+        <p:txBody>
+          <a:bodyPr/>
+          <a:p/>
+        </p:txBody>
       </p:sp>
       <p:sp>
         <p:nvSpPr>
@@ -18794,6 +19128,10 @@
             <a:prstDash val="solid"/>
           </a:ln>
         </p:spPr>
+        <p:txBody>
+          <a:bodyPr/>
+          <a:p/>
+        </p:txBody>
       </p:sp>
       <p:sp>
         <p:nvSpPr>
@@ -18867,6 +19205,10 @@
             </a:outerShdw>
           </a:effectLst>
         </p:spPr>
+        <p:txBody>
+          <a:bodyPr/>
+          <a:p/>
+        </p:txBody>
       </p:sp>
       <p:sp>
         <p:nvSpPr>
@@ -18887,6 +19229,10 @@
           </a:solidFill>
           <a:ln/>
         </p:spPr>
+        <p:txBody>
+          <a:bodyPr/>
+          <a:p/>
+        </p:txBody>
       </p:sp>
       <p:sp>
         <p:nvSpPr>
@@ -18999,6 +19345,10 @@
             </a:outerShdw>
           </a:effectLst>
         </p:spPr>
+        <p:txBody>
+          <a:bodyPr/>
+          <a:p/>
+        </p:txBody>
       </p:sp>
       <p:sp>
         <p:nvSpPr>
@@ -19019,6 +19369,10 @@
           </a:solidFill>
           <a:ln/>
         </p:spPr>
+        <p:txBody>
+          <a:bodyPr/>
+          <a:p/>
+        </p:txBody>
       </p:sp>
       <p:sp>
         <p:nvSpPr>
@@ -19092,7 +19446,7 @@
                 <a:ea typeface="Consolas" pitchFamily="34" charset="-122"/>
                 <a:cs typeface="Consolas" pitchFamily="34" charset="-120"/>
               </a:rPr>
-              <a:t>会话管理 📤 传 jar + 配置到对应 ECS</a:t>
+              <a:t>实例详情页“上传/下载文件”传 jar + 配置</a:t>
             </a:r>
             <a:endParaRPr lang="en-US" sz="1200" dirty="0"/>
           </a:p>
@@ -19131,6 +19485,10 @@
             </a:outerShdw>
           </a:effectLst>
         </p:spPr>
+        <p:txBody>
+          <a:bodyPr/>
+          <a:p/>
+        </p:txBody>
       </p:sp>
       <p:sp>
         <p:nvSpPr>
@@ -19151,6 +19509,10 @@
           </a:solidFill>
           <a:ln/>
         </p:spPr>
+        <p:txBody>
+          <a:bodyPr/>
+          <a:p/>
+        </p:txBody>
       </p:sp>
       <p:sp>
         <p:nvSpPr>
@@ -19263,6 +19625,10 @@
             </a:outerShdw>
           </a:effectLst>
         </p:spPr>
+        <p:txBody>
+          <a:bodyPr/>
+          <a:p/>
+        </p:txBody>
       </p:sp>
       <p:sp>
         <p:nvSpPr>
@@ -19283,6 +19649,10 @@
           </a:solidFill>
           <a:ln/>
         </p:spPr>
+        <p:txBody>
+          <a:bodyPr/>
+          <a:p/>
+        </p:txBody>
       </p:sp>
       <p:sp>
         <p:nvSpPr>
@@ -19395,6 +19765,10 @@
             </a:outerShdw>
           </a:effectLst>
         </p:spPr>
+        <p:txBody>
+          <a:bodyPr/>
+          <a:p/>
+        </p:txBody>
       </p:sp>
       <p:sp>
         <p:nvSpPr>
@@ -19415,6 +19789,10 @@
           </a:solidFill>
           <a:ln/>
         </p:spPr>
+        <p:txBody>
+          <a:bodyPr/>
+          <a:p/>
+        </p:txBody>
       </p:sp>
       <p:sp>
         <p:nvSpPr>
@@ -19527,6 +19905,10 @@
             </a:outerShdw>
           </a:effectLst>
         </p:spPr>
+        <p:txBody>
+          <a:bodyPr/>
+          <a:p/>
+        </p:txBody>
       </p:sp>
       <p:sp>
         <p:nvSpPr>
@@ -19547,6 +19929,10 @@
           </a:solidFill>
           <a:ln/>
         </p:spPr>
+        <p:txBody>
+          <a:bodyPr/>
+          <a:p/>
+        </p:txBody>
       </p:sp>
       <p:sp>
         <p:nvSpPr>
@@ -19677,6 +20063,10 @@
           </a:solidFill>
           <a:ln/>
         </p:spPr>
+        <p:txBody>
+          <a:bodyPr/>
+          <a:p/>
+        </p:txBody>
       </p:sp>
       <p:sp>
         <p:nvSpPr>
@@ -19697,6 +20087,10 @@
           </a:solidFill>
           <a:ln/>
         </p:spPr>
+        <p:txBody>
+          <a:bodyPr/>
+          <a:p/>
+        </p:txBody>
       </p:sp>
       <p:sp>
         <p:nvSpPr>
@@ -19958,6 +20352,10 @@
             <a:prstDash val="solid"/>
           </a:ln>
         </p:spPr>
+        <p:txBody>
+          <a:bodyPr/>
+          <a:p/>
+        </p:txBody>
       </p:sp>
       <p:sp>
         <p:nvSpPr>
@@ -20570,6 +20968,10 @@
             <a:prstDash val="solid"/>
           </a:ln>
         </p:spPr>
+        <p:txBody>
+          <a:bodyPr/>
+          <a:p/>
+        </p:txBody>
       </p:sp>
       <p:sp>
         <p:nvSpPr>
@@ -20714,6 +21116,10 @@
           </a:solidFill>
           <a:ln/>
         </p:spPr>
+        <p:txBody>
+          <a:bodyPr/>
+          <a:p/>
+        </p:txBody>
       </p:sp>
       <p:sp>
         <p:nvSpPr>
@@ -20734,6 +21140,10 @@
           </a:solidFill>
           <a:ln/>
         </p:spPr>
+        <p:txBody>
+          <a:bodyPr/>
+          <a:p/>
+        </p:txBody>
       </p:sp>
       <p:sp>
         <p:nvSpPr>
@@ -20924,6 +21334,10 @@
             </a:outerShdw>
           </a:effectLst>
         </p:spPr>
+        <p:txBody>
+          <a:bodyPr/>
+          <a:p/>
+        </p:txBody>
       </p:sp>
       <p:sp>
         <p:nvSpPr>
@@ -21088,6 +21502,10 @@
             </a:outerShdw>
           </a:effectLst>
         </p:spPr>
+        <p:txBody>
+          <a:bodyPr/>
+          <a:p/>
+        </p:txBody>
       </p:sp>
       <p:sp>
         <p:nvSpPr>
@@ -21161,7 +21579,7 @@
                 <a:ea typeface="微软雅黑" pitchFamily="34" charset="-122"/>
                 <a:cs typeface="微软雅黑" pitchFamily="34" charset="-120"/>
               </a:rPr>
-              <a:t>会话管理上传 dist.zip + deploy/coffee-admin.conf 到 /root/，整段粘：</a:t>
+              <a:t>实例详情页上传 dist.zip + deploy/coffee-admin.conf 到 /root/，整段粘：</a:t>
             </a:r>
             <a:endParaRPr lang="en-US" sz="1150" dirty="0"/>
           </a:p>
@@ -21193,6 +21611,10 @@
             <a:prstDash val="solid"/>
           </a:ln>
         </p:spPr>
+        <p:txBody>
+          <a:bodyPr/>
+          <a:p/>
+        </p:txBody>
       </p:sp>
       <p:sp>
         <p:nvSpPr>
@@ -21362,6 +21784,10 @@
             <a:prstDash val="solid"/>
           </a:ln>
         </p:spPr>
+        <p:txBody>
+          <a:bodyPr/>
+          <a:p/>
+        </p:txBody>
       </p:sp>
       <p:sp>
         <p:nvSpPr>
@@ -21467,6 +21893,10 @@
           </a:solidFill>
           <a:ln/>
         </p:spPr>
+        <p:txBody>
+          <a:bodyPr/>
+          <a:p/>
+        </p:txBody>
       </p:sp>
       <p:sp>
         <p:nvSpPr>
@@ -21487,6 +21917,10 @@
           </a:solidFill>
           <a:ln/>
         </p:spPr>
+        <p:txBody>
+          <a:bodyPr/>
+          <a:p/>
+        </p:txBody>
       </p:sp>
       <p:sp>
         <p:nvSpPr>
@@ -21670,6 +22104,10 @@
             <a:prstDash val="solid"/>
           </a:ln>
         </p:spPr>
+        <p:txBody>
+          <a:bodyPr/>
+          <a:p/>
+        </p:txBody>
       </p:sp>
       <p:sp>
         <p:nvSpPr>
@@ -21733,6 +22171,10 @@
             <a:tailEnd type="triangle"/>
           </a:ln>
         </p:spPr>
+        <p:txBody>
+          <a:bodyPr/>
+          <a:p/>
+        </p:txBody>
       </p:sp>
       <p:sp>
         <p:nvSpPr>
@@ -21799,6 +22241,10 @@
             <a:prstDash val="solid"/>
           </a:ln>
         </p:spPr>
+        <p:txBody>
+          <a:bodyPr/>
+          <a:p/>
+        </p:txBody>
       </p:sp>
       <p:sp>
         <p:nvSpPr>
@@ -21862,6 +22308,10 @@
             <a:tailEnd type="triangle"/>
           </a:ln>
         </p:spPr>
+        <p:txBody>
+          <a:bodyPr/>
+          <a:p/>
+        </p:txBody>
       </p:sp>
       <p:sp>
         <p:nvSpPr>
@@ -21928,6 +22378,10 @@
             <a:prstDash val="solid"/>
           </a:ln>
         </p:spPr>
+        <p:txBody>
+          <a:bodyPr/>
+          <a:p/>
+        </p:txBody>
       </p:sp>
       <p:sp>
         <p:nvSpPr>
@@ -21994,6 +22448,10 @@
             <a:prstDash val="solid"/>
           </a:ln>
         </p:spPr>
+        <p:txBody>
+          <a:bodyPr/>
+          <a:p/>
+        </p:txBody>
       </p:sp>
       <p:sp>
         <p:nvSpPr>
@@ -22057,6 +22515,10 @@
             <a:tailEnd type="triangle"/>
           </a:ln>
         </p:spPr>
+        <p:txBody>
+          <a:bodyPr/>
+          <a:p/>
+        </p:txBody>
       </p:sp>
       <p:sp>
         <p:nvSpPr>
@@ -22081,6 +22543,10 @@
             <a:tailEnd type="triangle"/>
           </a:ln>
         </p:spPr>
+        <p:txBody>
+          <a:bodyPr/>
+          <a:p/>
+        </p:txBody>
       </p:sp>
       <p:sp>
         <p:nvSpPr>
@@ -22108,6 +22574,10 @@
             <a:prstDash val="solid"/>
           </a:ln>
         </p:spPr>
+        <p:txBody>
+          <a:bodyPr/>
+          <a:p/>
+        </p:txBody>
       </p:sp>
       <p:sp>
         <p:nvSpPr>
@@ -22213,6 +22683,10 @@
             <a:prstDash val="solid"/>
           </a:ln>
         </p:spPr>
+        <p:txBody>
+          <a:bodyPr/>
+          <a:p/>
+        </p:txBody>
       </p:sp>
       <p:sp>
         <p:nvSpPr>
@@ -22399,6 +22873,10 @@
           </a:solidFill>
           <a:ln/>
         </p:spPr>
+        <p:txBody>
+          <a:bodyPr/>
+          <a:p/>
+        </p:txBody>
       </p:sp>
       <p:sp>
         <p:nvSpPr>
@@ -22419,6 +22897,10 @@
           </a:solidFill>
           <a:ln/>
         </p:spPr>
+        <p:txBody>
+          <a:bodyPr/>
+          <a:p/>
+        </p:txBody>
       </p:sp>
       <p:sp>
         <p:nvSpPr>
@@ -22602,6 +23084,10 @@
             <a:prstDash val="solid"/>
           </a:ln>
         </p:spPr>
+        <p:txBody>
+          <a:bodyPr/>
+          <a:p/>
+        </p:txBody>
       </p:sp>
       <p:sp>
         <p:nvSpPr>
@@ -22665,6 +23151,10 @@
             <a:tailEnd type="triangle"/>
           </a:ln>
         </p:spPr>
+        <p:txBody>
+          <a:bodyPr/>
+          <a:p/>
+        </p:txBody>
       </p:sp>
       <p:sp>
         <p:nvSpPr>
@@ -22689,6 +23179,10 @@
             <a:tailEnd type="triangle"/>
           </a:ln>
         </p:spPr>
+        <p:txBody>
+          <a:bodyPr/>
+          <a:p/>
+        </p:txBody>
       </p:sp>
       <p:sp>
         <p:nvSpPr>
@@ -22794,6 +23288,10 @@
             <a:prstDash val="solid"/>
           </a:ln>
         </p:spPr>
+        <p:txBody>
+          <a:bodyPr/>
+          <a:p/>
+        </p:txBody>
       </p:sp>
       <p:sp>
         <p:nvSpPr>
@@ -22860,6 +23358,10 @@
             <a:prstDash val="solid"/>
           </a:ln>
         </p:spPr>
+        <p:txBody>
+          <a:bodyPr/>
+          <a:p/>
+        </p:txBody>
       </p:sp>
       <p:sp>
         <p:nvSpPr>
@@ -22923,6 +23425,10 @@
             <a:tailEnd type="triangle"/>
           </a:ln>
         </p:spPr>
+        <p:txBody>
+          <a:bodyPr/>
+          <a:p/>
+        </p:txBody>
       </p:sp>
       <p:sp>
         <p:nvSpPr>
@@ -22950,6 +23456,10 @@
             <a:prstDash val="solid"/>
           </a:ln>
         </p:spPr>
+        <p:txBody>
+          <a:bodyPr/>
+          <a:p/>
+        </p:txBody>
       </p:sp>
       <p:sp>
         <p:nvSpPr>
@@ -23013,6 +23523,10 @@
             <a:tailEnd type="triangle"/>
           </a:ln>
         </p:spPr>
+        <p:txBody>
+          <a:bodyPr/>
+          <a:p/>
+        </p:txBody>
       </p:sp>
       <p:sp>
         <p:nvSpPr>
@@ -23079,6 +23593,10 @@
             <a:prstDash val="solid"/>
           </a:ln>
         </p:spPr>
+        <p:txBody>
+          <a:bodyPr/>
+          <a:p/>
+        </p:txBody>
       </p:sp>
       <p:sp>
         <p:nvSpPr>
@@ -23145,6 +23663,10 @@
             <a:prstDash val="solid"/>
           </a:ln>
         </p:spPr>
+        <p:txBody>
+          <a:bodyPr/>
+          <a:p/>
+        </p:txBody>
       </p:sp>
       <p:sp>
         <p:nvSpPr>
@@ -23208,6 +23730,10 @@
             <a:tailEnd type="triangle"/>
           </a:ln>
         </p:spPr>
+        <p:txBody>
+          <a:bodyPr/>
+          <a:p/>
+        </p:txBody>
       </p:sp>
       <p:sp>
         <p:nvSpPr>
@@ -23235,6 +23761,10 @@
             <a:prstDash val="solid"/>
           </a:ln>
         </p:spPr>
+        <p:txBody>
+          <a:bodyPr/>
+          <a:p/>
+        </p:txBody>
       </p:sp>
       <p:sp>
         <p:nvSpPr>
@@ -23301,6 +23831,10 @@
             <a:prstDash val="solid"/>
           </a:ln>
         </p:spPr>
+        <p:txBody>
+          <a:bodyPr/>
+          <a:p/>
+        </p:txBody>
       </p:sp>
       <p:sp>
         <p:nvSpPr>
@@ -23470,6 +24004,10 @@
           </a:solidFill>
           <a:ln/>
         </p:spPr>
+        <p:txBody>
+          <a:bodyPr/>
+          <a:p/>
+        </p:txBody>
       </p:sp>
       <p:sp>
         <p:nvSpPr>
@@ -23490,6 +24028,10 @@
           </a:solidFill>
           <a:ln/>
         </p:spPr>
+        <p:txBody>
+          <a:bodyPr/>
+          <a:p/>
+        </p:txBody>
       </p:sp>
       <p:sp>
         <p:nvSpPr>
@@ -25659,6 +26201,10 @@
           </a:solidFill>
           <a:ln/>
         </p:spPr>
+        <p:txBody>
+          <a:bodyPr/>
+          <a:p/>
+        </p:txBody>
       </p:sp>
       <p:sp>
         <p:nvSpPr>
@@ -25679,6 +26225,10 @@
           </a:solidFill>
           <a:ln/>
         </p:spPr>
+        <p:txBody>
+          <a:bodyPr/>
+          <a:p/>
+        </p:txBody>
       </p:sp>
       <p:sp>
         <p:nvSpPr>
@@ -25869,6 +26419,10 @@
             </a:outerShdw>
           </a:effectLst>
         </p:spPr>
+        <p:txBody>
+          <a:bodyPr/>
+          <a:p/>
+        </p:txBody>
       </p:sp>
       <p:sp>
         <p:nvSpPr>
@@ -25889,6 +26443,10 @@
           </a:solidFill>
           <a:ln/>
         </p:spPr>
+        <p:txBody>
+          <a:bodyPr/>
+          <a:p/>
+        </p:txBody>
       </p:sp>
       <p:sp>
         <p:nvSpPr>
@@ -26134,6 +26692,10 @@
             </a:outerShdw>
           </a:effectLst>
         </p:spPr>
+        <p:txBody>
+          <a:bodyPr/>
+          <a:p/>
+        </p:txBody>
       </p:sp>
       <p:sp>
         <p:nvSpPr>
@@ -26154,6 +26716,10 @@
           </a:solidFill>
           <a:ln/>
         </p:spPr>
+        <p:txBody>
+          <a:bodyPr/>
+          <a:p/>
+        </p:txBody>
       </p:sp>
       <p:sp>
         <p:nvSpPr>
@@ -26399,6 +26965,10 @@
             </a:outerShdw>
           </a:effectLst>
         </p:spPr>
+        <p:txBody>
+          <a:bodyPr/>
+          <a:p/>
+        </p:txBody>
       </p:sp>
       <p:sp>
         <p:nvSpPr>
@@ -26419,6 +26989,10 @@
           </a:solidFill>
           <a:ln/>
         </p:spPr>
+        <p:txBody>
+          <a:bodyPr/>
+          <a:p/>
+        </p:txBody>
       </p:sp>
       <p:sp>
         <p:nvSpPr>
@@ -26657,6 +27231,10 @@
             <a:prstDash val="solid"/>
           </a:ln>
         </p:spPr>
+        <p:txBody>
+          <a:bodyPr/>
+          <a:p/>
+        </p:txBody>
       </p:sp>
       <p:sp>
         <p:nvSpPr>
@@ -26762,6 +27340,10 @@
           </a:solidFill>
           <a:ln/>
         </p:spPr>
+        <p:txBody>
+          <a:bodyPr/>
+          <a:p/>
+        </p:txBody>
       </p:sp>
       <p:sp>
         <p:nvSpPr>
@@ -26782,6 +27364,10 @@
           </a:solidFill>
           <a:ln/>
         </p:spPr>
+        <p:txBody>
+          <a:bodyPr/>
+          <a:p/>
+        </p:txBody>
       </p:sp>
       <p:sp>
         <p:nvSpPr>
@@ -27004,6 +27590,10 @@
             <a:prstDash val="solid"/>
           </a:ln>
         </p:spPr>
+        <p:txBody>
+          <a:bodyPr/>
+          <a:p/>
+        </p:txBody>
       </p:sp>
       <p:sp>
         <p:nvSpPr>
@@ -27067,6 +27657,10 @@
             <a:tailEnd type="triangle"/>
           </a:ln>
         </p:spPr>
+        <p:txBody>
+          <a:bodyPr/>
+          <a:p/>
+        </p:txBody>
       </p:sp>
       <p:sp>
         <p:nvSpPr>
@@ -27094,6 +27688,10 @@
             <a:prstDash val="solid"/>
           </a:ln>
         </p:spPr>
+        <p:txBody>
+          <a:bodyPr/>
+          <a:p/>
+        </p:txBody>
       </p:sp>
       <p:sp>
         <p:nvSpPr>
@@ -27157,6 +27755,10 @@
             <a:tailEnd type="triangle"/>
           </a:ln>
         </p:spPr>
+        <p:txBody>
+          <a:bodyPr/>
+          <a:p/>
+        </p:txBody>
       </p:sp>
       <p:sp>
         <p:nvSpPr>
@@ -27184,6 +27786,10 @@
             <a:prstDash val="solid"/>
           </a:ln>
         </p:spPr>
+        <p:txBody>
+          <a:bodyPr/>
+          <a:p/>
+        </p:txBody>
       </p:sp>
       <p:sp>
         <p:nvSpPr>
@@ -27247,6 +27853,10 @@
             <a:tailEnd type="triangle"/>
           </a:ln>
         </p:spPr>
+        <p:txBody>
+          <a:bodyPr/>
+          <a:p/>
+        </p:txBody>
       </p:sp>
       <p:sp>
         <p:nvSpPr>
@@ -27274,6 +27884,10 @@
             <a:prstDash val="solid"/>
           </a:ln>
         </p:spPr>
+        <p:txBody>
+          <a:bodyPr/>
+          <a:p/>
+        </p:txBody>
       </p:sp>
       <p:sp>
         <p:nvSpPr>
@@ -27337,6 +27951,10 @@
             <a:tailEnd type="triangle"/>
           </a:ln>
         </p:spPr>
+        <p:txBody>
+          <a:bodyPr/>
+          <a:p/>
+        </p:txBody>
       </p:sp>
       <p:sp>
         <p:nvSpPr>
@@ -27364,6 +27982,10 @@
             <a:prstDash val="solid"/>
           </a:ln>
         </p:spPr>
+        <p:txBody>
+          <a:bodyPr/>
+          <a:p/>
+        </p:txBody>
       </p:sp>
       <p:sp>
         <p:nvSpPr>
@@ -27437,6 +28059,10 @@
             </a:outerShdw>
           </a:effectLst>
         </p:spPr>
+        <p:txBody>
+          <a:bodyPr/>
+          <a:p/>
+        </p:txBody>
       </p:sp>
       <p:sp>
         <p:nvSpPr>
@@ -27529,7 +28155,7 @@
                   <a:srgbClr val="1C2B3A"/>
                 </a:solidFill>
               </a:rPr>
-              <a:t>会话管理 📤 上传 jar  →  “主机部署 / EDAS 发布 / SAE 发布”自动调</a:t>
+              <a:t>实例详情页上传 jar  →  “主机部署 / EDAS 发布 / SAE 发布”自动调</a:t>
             </a:r>
             <a:endParaRPr lang="en-US" sz="1400" dirty="0"/>
           </a:p>
@@ -27619,6 +28245,10 @@
           </a:solidFill>
           <a:ln/>
         </p:spPr>
+        <p:txBody>
+          <a:bodyPr/>
+          <a:p/>
+        </p:txBody>
       </p:sp>
       <p:sp>
         <p:nvSpPr>
@@ -27685,6 +28315,10 @@
             <a:prstDash val="solid"/>
           </a:ln>
         </p:spPr>
+        <p:txBody>
+          <a:bodyPr/>
+          <a:p/>
+        </p:txBody>
       </p:sp>
       <p:sp>
         <p:nvSpPr>
@@ -27705,6 +28339,10 @@
           </a:solidFill>
           <a:ln/>
         </p:spPr>
+        <p:txBody>
+          <a:bodyPr/>
+          <a:p/>
+        </p:txBody>
       </p:sp>
       <p:sp>
         <p:nvSpPr>
@@ -27849,6 +28487,10 @@
             <a:prstDash val="solid"/>
           </a:ln>
         </p:spPr>
+        <p:txBody>
+          <a:bodyPr/>
+          <a:p/>
+        </p:txBody>
       </p:sp>
       <p:sp>
         <p:nvSpPr>
@@ -27869,6 +28511,10 @@
           </a:solidFill>
           <a:ln/>
         </p:spPr>
+        <p:txBody>
+          <a:bodyPr/>
+          <a:p/>
+        </p:txBody>
       </p:sp>
       <p:sp>
         <p:nvSpPr>
@@ -28013,6 +28659,10 @@
             <a:prstDash val="solid"/>
           </a:ln>
         </p:spPr>
+        <p:txBody>
+          <a:bodyPr/>
+          <a:p/>
+        </p:txBody>
       </p:sp>
       <p:sp>
         <p:nvSpPr>
@@ -28033,6 +28683,10 @@
           </a:solidFill>
           <a:ln/>
         </p:spPr>
+        <p:txBody>
+          <a:bodyPr/>
+          <a:p/>
+        </p:txBody>
       </p:sp>
       <p:sp>
         <p:nvSpPr>
@@ -28177,6 +28831,10 @@
             <a:prstDash val="solid"/>
           </a:ln>
         </p:spPr>
+        <p:txBody>
+          <a:bodyPr/>
+          <a:p/>
+        </p:txBody>
       </p:sp>
       <p:sp>
         <p:nvSpPr>
@@ -28197,6 +28855,10 @@
           </a:solidFill>
           <a:ln/>
         </p:spPr>
+        <p:txBody>
+          <a:bodyPr/>
+          <a:p/>
+        </p:txBody>
       </p:sp>
       <p:sp>
         <p:nvSpPr>
@@ -28366,6 +29028,10 @@
           </a:solidFill>
           <a:ln/>
         </p:spPr>
+        <p:txBody>
+          <a:bodyPr/>
+          <a:p/>
+        </p:txBody>
       </p:sp>
       <p:sp>
         <p:nvSpPr>
@@ -28386,6 +29052,10 @@
           </a:solidFill>
           <a:ln/>
         </p:spPr>
+        <p:txBody>
+          <a:bodyPr/>
+          <a:p/>
+        </p:txBody>
       </p:sp>
       <p:sp>
         <p:nvSpPr>
@@ -28615,6 +29285,10 @@
             </a:outerShdw>
           </a:effectLst>
         </p:spPr>
+        <p:txBody>
+          <a:bodyPr/>
+          <a:p/>
+        </p:txBody>
       </p:sp>
       <p:sp>
         <p:nvSpPr>
@@ -28635,6 +29309,10 @@
           </a:solidFill>
           <a:ln/>
         </p:spPr>
+        <p:txBody>
+          <a:bodyPr/>
+          <a:p/>
+        </p:txBody>
       </p:sp>
       <p:sp>
         <p:nvSpPr>
@@ -28786,6 +29464,10 @@
             </a:outerShdw>
           </a:effectLst>
         </p:spPr>
+        <p:txBody>
+          <a:bodyPr/>
+          <a:p/>
+        </p:txBody>
       </p:sp>
       <p:sp>
         <p:nvSpPr>
@@ -28806,6 +29488,10 @@
           </a:solidFill>
           <a:ln/>
         </p:spPr>
+        <p:txBody>
+          <a:bodyPr/>
+          <a:p/>
+        </p:txBody>
       </p:sp>
       <p:sp>
         <p:nvSpPr>
@@ -28957,6 +29643,10 @@
             </a:outerShdw>
           </a:effectLst>
         </p:spPr>
+        <p:txBody>
+          <a:bodyPr/>
+          <a:p/>
+        </p:txBody>
       </p:sp>
       <p:sp>
         <p:nvSpPr>
@@ -28977,6 +29667,10 @@
           </a:solidFill>
           <a:ln/>
         </p:spPr>
+        <p:txBody>
+          <a:bodyPr/>
+          <a:p/>
+        </p:txBody>
       </p:sp>
       <p:sp>
         <p:nvSpPr>
@@ -29185,6 +29879,10 @@
           </a:solidFill>
           <a:ln/>
         </p:spPr>
+        <p:txBody>
+          <a:bodyPr/>
+          <a:p/>
+        </p:txBody>
       </p:sp>
       <p:sp>
         <p:nvSpPr>
@@ -29205,6 +29903,10 @@
           </a:solidFill>
           <a:ln/>
         </p:spPr>
+        <p:txBody>
+          <a:bodyPr/>
+          <a:p/>
+        </p:txBody>
       </p:sp>
       <p:sp>
         <p:nvSpPr>
@@ -29395,6 +30097,10 @@
             </a:outerShdw>
           </a:effectLst>
         </p:spPr>
+        <p:txBody>
+          <a:bodyPr/>
+          <a:p/>
+        </p:txBody>
       </p:sp>
       <p:sp>
         <p:nvSpPr>
@@ -29415,6 +30121,10 @@
           </a:solidFill>
           <a:ln/>
         </p:spPr>
+        <p:txBody>
+          <a:bodyPr/>
+          <a:p/>
+        </p:txBody>
       </p:sp>
       <p:sp>
         <p:nvSpPr>
@@ -29569,6 +30279,10 @@
             </a:outerShdw>
           </a:effectLst>
         </p:spPr>
+        <p:txBody>
+          <a:bodyPr/>
+          <a:p/>
+        </p:txBody>
       </p:sp>
       <p:sp>
         <p:nvSpPr>
@@ -29589,6 +30303,10 @@
           </a:solidFill>
           <a:ln/>
         </p:spPr>
+        <p:txBody>
+          <a:bodyPr/>
+          <a:p/>
+        </p:txBody>
       </p:sp>
       <p:sp>
         <p:nvSpPr>
@@ -29743,6 +30461,10 @@
             </a:outerShdw>
           </a:effectLst>
         </p:spPr>
+        <p:txBody>
+          <a:bodyPr/>
+          <a:p/>
+        </p:txBody>
       </p:sp>
       <p:sp>
         <p:nvSpPr>
@@ -29763,6 +30485,10 @@
           </a:solidFill>
           <a:ln/>
         </p:spPr>
+        <p:txBody>
+          <a:bodyPr/>
+          <a:p/>
+        </p:txBody>
       </p:sp>
       <p:sp>
         <p:nvSpPr>
@@ -29917,6 +30643,10 @@
             </a:outerShdw>
           </a:effectLst>
         </p:spPr>
+        <p:txBody>
+          <a:bodyPr/>
+          <a:p/>
+        </p:txBody>
       </p:sp>
       <p:sp>
         <p:nvSpPr>
@@ -29937,6 +30667,10 @@
           </a:solidFill>
           <a:ln/>
         </p:spPr>
+        <p:txBody>
+          <a:bodyPr/>
+          <a:p/>
+        </p:txBody>
       </p:sp>
       <p:sp>
         <p:nvSpPr>
@@ -30109,6 +30843,10 @@
           </a:solidFill>
           <a:ln/>
         </p:spPr>
+        <p:txBody>
+          <a:bodyPr/>
+          <a:p/>
+        </p:txBody>
       </p:sp>
       <p:sp>
         <p:nvSpPr>
@@ -30129,6 +30867,10 @@
           </a:solidFill>
           <a:ln/>
         </p:spPr>
+        <p:txBody>
+          <a:bodyPr/>
+          <a:p/>
+        </p:txBody>
       </p:sp>
       <p:sp>
         <p:nvSpPr>
@@ -30319,6 +31061,10 @@
             </a:outerShdw>
           </a:effectLst>
         </p:spPr>
+        <p:txBody>
+          <a:bodyPr/>
+          <a:p/>
+        </p:txBody>
       </p:sp>
       <p:sp>
         <p:nvSpPr>
@@ -30339,6 +31085,10 @@
           </a:solidFill>
           <a:ln/>
         </p:spPr>
+        <p:txBody>
+          <a:bodyPr/>
+          <a:p/>
+        </p:txBody>
       </p:sp>
       <p:sp>
         <p:nvSpPr>
@@ -30468,6 +31218,10 @@
             </a:outerShdw>
           </a:effectLst>
         </p:spPr>
+        <p:txBody>
+          <a:bodyPr/>
+          <a:p/>
+        </p:txBody>
       </p:sp>
       <p:sp>
         <p:nvSpPr>
@@ -30488,6 +31242,10 @@
           </a:solidFill>
           <a:ln/>
         </p:spPr>
+        <p:txBody>
+          <a:bodyPr/>
+          <a:p/>
+        </p:txBody>
       </p:sp>
       <p:sp>
         <p:nvSpPr>
@@ -30617,6 +31375,10 @@
             </a:outerShdw>
           </a:effectLst>
         </p:spPr>
+        <p:txBody>
+          <a:bodyPr/>
+          <a:p/>
+        </p:txBody>
       </p:sp>
       <p:sp>
         <p:nvSpPr>
@@ -30637,6 +31399,10 @@
           </a:solidFill>
           <a:ln/>
         </p:spPr>
+        <p:txBody>
+          <a:bodyPr/>
+          <a:p/>
+        </p:txBody>
       </p:sp>
       <p:sp>
         <p:nvSpPr>
@@ -30759,6 +31525,10 @@
             <a:prstDash val="solid"/>
           </a:ln>
         </p:spPr>
+        <p:txBody>
+          <a:bodyPr/>
+          <a:p/>
+        </p:txBody>
       </p:sp>
       <p:sp>
         <p:nvSpPr>
@@ -30846,6 +31616,10 @@
             </a:outerShdw>
           </a:effectLst>
         </p:spPr>
+        <p:txBody>
+          <a:bodyPr/>
+          <a:p/>
+        </p:txBody>
       </p:sp>
       <p:sp>
         <p:nvSpPr>
@@ -30953,7 +31727,7 @@
                   <a:srgbClr val="1C7293"/>
                 </a:solidFill>
               </a:rPr>
-              <a:t>RDS / MSE 各有独立白名单（与 VPC 无关）：SAE 实例 IP 从 VSwitch 网段动态分配，要把整个网段加进白名单</a:t>
+              <a:t>RDS / MSE 各有独立白名单（与 VPC 无关）：SAE 实例 IP 从 虚拟交换机 网段动态分配，要把整个网段加进白名单</a:t>
             </a:r>
             <a:endParaRPr lang="en-US" sz="1350" dirty="0"/>
           </a:p>
@@ -31010,6 +31784,10 @@
           </a:solidFill>
           <a:ln/>
         </p:spPr>
+        <p:txBody>
+          <a:bodyPr/>
+          <a:p/>
+        </p:txBody>
       </p:sp>
       <p:sp>
         <p:nvSpPr>
@@ -31030,6 +31808,10 @@
           </a:solidFill>
           <a:ln/>
         </p:spPr>
+        <p:txBody>
+          <a:bodyPr/>
+          <a:p/>
+        </p:txBody>
       </p:sp>
       <p:sp>
         <p:nvSpPr>
@@ -31259,6 +32041,10 @@
             </a:outerShdw>
           </a:effectLst>
         </p:spPr>
+        <p:txBody>
+          <a:bodyPr/>
+          <a:p/>
+        </p:txBody>
       </p:sp>
       <p:sp>
         <p:nvSpPr>
@@ -31354,7 +32140,7 @@
         </p:nvGraphicFramePr>
         <p:xfrm>
           <a:off x="960120" y="2697480"/>
-          <a:ext cx="5669280" cy="914400"/>
+          <a:ext cx="5669280" cy="2084832"/>
         </p:xfrm>
         <a:graphic>
           <a:graphicData uri="http://schemas.openxmlformats.org/drawingml/2006/table">
@@ -31364,7 +32150,7 @@
                 <a:gridCol w="1737360"/>
                 <a:gridCol w="3931920"/>
               </a:tblGrid>
-              <a:tr h="420624">
+              <a:tr h="347472">
                 <a:tc>
                   <a:txBody>
                     <a:bodyPr/>
@@ -31374,7 +32160,7 @@
                         <a:buNone/>
                       </a:pPr>
                       <a:r>
-                        <a:rPr lang="en-US" sz="1250" b="1" dirty="0">
+                        <a:rPr lang="en-US" sz="1200" b="1" dirty="0">
                           <a:solidFill>
                             <a:srgbClr val="FFFFFF"/>
                           </a:solidFill>
@@ -31442,7 +32228,7 @@
                         <a:buNone/>
                       </a:pPr>
                       <a:r>
-                        <a:rPr lang="en-US" sz="1250" b="1" dirty="0">
+                        <a:rPr lang="en-US" sz="1200" b="1" dirty="0">
                           <a:solidFill>
                             <a:srgbClr val="FFFFFF"/>
                           </a:solidFill>
@@ -31502,7 +32288,7 @@
                   </a:tcPr>
                 </a:tc>
               </a:tr>
-              <a:tr h="420624">
+              <a:tr h="347472">
                 <a:tc>
                   <a:txBody>
                     <a:bodyPr/>
@@ -31640,7 +32426,7 @@
                   </a:tcPr>
                 </a:tc>
               </a:tr>
-              <a:tr h="420624">
+              <a:tr h="347472">
                 <a:tc>
                   <a:txBody>
                     <a:bodyPr/>
@@ -31778,7 +32564,7 @@
                   </a:tcPr>
                 </a:tc>
               </a:tr>
-              <a:tr h="420624">
+              <a:tr h="347472">
                 <a:tc>
                   <a:txBody>
                     <a:bodyPr/>
@@ -31864,7 +32650,7 @@
                           <a:ea typeface="微软雅黑" pitchFamily="34" charset="-122"/>
                           <a:cs typeface="微软雅黑" pitchFamily="34" charset="-120"/>
                         </a:rPr>
-                        <a:t>3（专业版最少 3、必须奇数）</a:t>
+                        <a:t>3（专业版最少 3 节点）</a:t>
                       </a:r>
                       <a:endParaRPr lang="en-US" sz="1150" dirty="0">
                         <a:latin typeface="微软雅黑" charset="0"/>
@@ -31916,7 +32702,7 @@
                   </a:tcPr>
                 </a:tc>
               </a:tr>
-              <a:tr h="420624">
+              <a:tr h="347472">
                 <a:tc>
                   <a:txBody>
                     <a:bodyPr/>
@@ -32054,7 +32840,7 @@
                   </a:tcPr>
                 </a:tc>
               </a:tr>
-              <a:tr h="420624">
+              <a:tr h="347472">
                 <a:tc>
                   <a:txBody>
                     <a:bodyPr/>
@@ -32303,17 +33089,21 @@
             <a:prstDash val="solid"/>
           </a:ln>
         </p:spPr>
-      </p:sp>
-      <p:sp>
-        <p:nvSpPr>
-          <p:cNvPr id="16" name="Text 13"/>
-          <p:cNvSpPr/>
-          <p:nvPr/>
-        </p:nvSpPr>
-        <p:spPr>
-          <a:xfrm>
-            <a:off x="6903720" y="1783080"/>
-            <a:ext cx="4526280" cy="4251960"/>
+        <p:txBody>
+          <a:bodyPr/>
+          <a:p/>
+        </p:txBody>
+      </p:sp>
+      <p:sp>
+        <p:nvSpPr>
+          <p:cNvPr id="17" name="Text 14"/>
+          <p:cNvSpPr/>
+          <p:nvPr/>
+        </p:nvSpPr>
+        <p:spPr>
+          <a:xfrm>
+            <a:off x="822960" y="6144768"/>
+            <a:ext cx="10607040" cy="365760"/>
           </a:xfrm>
           <a:prstGeom prst="rect">
             <a:avLst/>
@@ -32325,63 +33115,53 @@
           <a:bodyPr wrap="square" lIns="0" tIns="0" rIns="0" bIns="0" rtlCol="0" anchor="ctr"/>
           <a:lstStyle/>
           <a:p>
-            <a:pPr algn="ctr" indent="0" marL="0">
-              <a:buNone/>
-            </a:pPr>
-            <a:r>
-              <a:rPr lang="en-US" sz="4600" dirty="0">
-                <a:solidFill>
-                  <a:srgbClr val="9FB0C2"/>
+            <a:pPr indent="0" marL="0">
+              <a:buNone/>
+            </a:pPr>
+            <a:r>
+              <a:rPr lang="en-US" sz="1150" b="1" i="1" dirty="0">
+                <a:solidFill>
+                  <a:srgbClr val="B5630A"/>
                 </a:solidFill>
                 <a:latin typeface="微软雅黑" pitchFamily="34" charset="0"/>
                 <a:ea typeface="微软雅黑" pitchFamily="34" charset="-122"/>
                 <a:cs typeface="微软雅黑" pitchFamily="34" charset="-120"/>
               </a:rPr>
-              <a:t>📷</a:t>
-            </a:r>
-            <a:endParaRPr lang="en-US" sz="4600" dirty="0"/>
-          </a:p>
-        </p:txBody>
-      </p:sp>
-      <p:sp>
-        <p:nvSpPr>
-          <p:cNvPr id="17" name="Text 14"/>
-          <p:cNvSpPr/>
-          <p:nvPr/>
-        </p:nvSpPr>
-        <p:spPr>
-          <a:xfrm>
-            <a:off x="822960" y="6144768"/>
-            <a:ext cx="10607040" cy="365760"/>
-          </a:xfrm>
-          <a:prstGeom prst="rect">
-            <a:avLst/>
-          </a:prstGeom>
-          <a:noFill/>
-          <a:ln/>
-        </p:spPr>
-        <p:txBody>
-          <a:bodyPr wrap="square" lIns="0" tIns="0" rIns="0" bIns="0" rtlCol="0" anchor="ctr"/>
-          <a:lstStyle/>
-          <a:p>
-            <a:pPr indent="0" marL="0">
-              <a:buNone/>
-            </a:pPr>
-            <a:r>
-              <a:rPr lang="en-US" sz="1150" b="1" i="1" dirty="0">
-                <a:solidFill>
-                  <a:srgbClr val="B5630A"/>
-                </a:solidFill>
-                <a:latin typeface="微软雅黑" pitchFamily="34" charset="0"/>
-                <a:ea typeface="微软雅黑" pitchFamily="34" charset="-122"/>
-                <a:cs typeface="微软雅黑" pitchFamily="34" charset="-120"/>
-              </a:rPr>
               <a:t>🔥 规格必须选专业版（Dubbo 3.x 走 SAE 的“MSE Nacos 专业版”官方集成，开发测试版接不进去）；且与 ECS / RDS 同地域、同 VPC。</a:t>
             </a:r>
             <a:endParaRPr lang="en-US" sz="1150" dirty="0"/>
           </a:p>
         </p:txBody>
       </p:sp>
+      <p:pic>
+        <p:nvPicPr>
+          <p:cNvPr id="18" name="Picture 17" descr="p893433.png"/>
+          <p:cNvPicPr>
+            <a:picLocks noChangeAspect="1"/>
+          </p:cNvPicPr>
+          <p:nvPr/>
+        </p:nvPicPr>
+        <p:blipFill>
+          <a:blip r:embed="rId3"/>
+          <a:stretch>
+            <a:fillRect/>
+          </a:stretch>
+        </p:blipFill>
+        <p:spPr>
+          <a:xfrm>
+            <a:off x="6903720" y="2959144"/>
+            <a:ext cx="4526280" cy="1899832"/>
+          </a:xfrm>
+          <a:prstGeom prst="rect">
+            <a:avLst/>
+          </a:prstGeom>
+          <a:ln w="9525">
+            <a:solidFill>
+              <a:srgbClr val="CCCCCC"/>
+            </a:solidFill>
+          </a:ln>
+        </p:spPr>
+      </p:pic>
     </p:spTree>
   </p:cSld>
   <p:clrMapOvr>
@@ -32433,6 +33213,10 @@
           </a:solidFill>
           <a:ln/>
         </p:spPr>
+        <p:txBody>
+          <a:bodyPr/>
+          <a:p/>
+        </p:txBody>
       </p:sp>
       <p:sp>
         <p:nvSpPr>
@@ -32453,6 +33237,10 @@
           </a:solidFill>
           <a:ln/>
         </p:spPr>
+        <p:txBody>
+          <a:bodyPr/>
+          <a:p/>
+        </p:txBody>
       </p:sp>
       <p:sp>
         <p:nvSpPr>
@@ -32643,6 +33431,10 @@
             </a:outerShdw>
           </a:effectLst>
         </p:spPr>
+        <p:txBody>
+          <a:bodyPr/>
+          <a:p/>
+        </p:txBody>
       </p:sp>
       <p:sp>
         <p:nvSpPr>
@@ -32709,6 +33501,10 @@
             <a:prstDash val="solid"/>
           </a:ln>
         </p:spPr>
+        <p:txBody>
+          <a:bodyPr/>
+          <a:p/>
+        </p:txBody>
       </p:sp>
       <p:sp>
         <p:nvSpPr>
@@ -32775,6 +33571,10 @@
             <a:prstDash val="solid"/>
           </a:ln>
         </p:spPr>
+        <p:txBody>
+          <a:bodyPr/>
+          <a:p/>
+        </p:txBody>
       </p:sp>
       <p:sp>
         <p:nvSpPr>
@@ -32841,6 +33641,10 @@
             <a:prstDash val="solid"/>
           </a:ln>
         </p:spPr>
+        <p:txBody>
+          <a:bodyPr/>
+          <a:p/>
+        </p:txBody>
       </p:sp>
       <p:sp>
         <p:nvSpPr>
@@ -32914,6 +33718,10 @@
             </a:outerShdw>
           </a:effectLst>
         </p:spPr>
+        <p:txBody>
+          <a:bodyPr/>
+          <a:p/>
+        </p:txBody>
       </p:sp>
       <p:sp>
         <p:nvSpPr>
@@ -32980,6 +33788,10 @@
             <a:prstDash val="solid"/>
           </a:ln>
         </p:spPr>
+        <p:txBody>
+          <a:bodyPr/>
+          <a:p/>
+        </p:txBody>
       </p:sp>
       <p:sp>
         <p:nvSpPr>
@@ -33046,6 +33858,10 @@
             <a:prstDash val="solid"/>
           </a:ln>
         </p:spPr>
+        <p:txBody>
+          <a:bodyPr/>
+          <a:p/>
+        </p:txBody>
       </p:sp>
       <p:sp>
         <p:nvSpPr>
@@ -33112,6 +33928,10 @@
             <a:prstDash val="solid"/>
           </a:ln>
         </p:spPr>
+        <p:txBody>
+          <a:bodyPr/>
+          <a:p/>
+        </p:txBody>
       </p:sp>
       <p:sp>
         <p:nvSpPr>
@@ -33185,6 +34005,10 @@
             </a:outerShdw>
           </a:effectLst>
         </p:spPr>
+        <p:txBody>
+          <a:bodyPr/>
+          <a:p/>
+        </p:txBody>
       </p:sp>
       <p:sp>
         <p:nvSpPr>
@@ -33251,6 +34075,10 @@
             <a:prstDash val="solid"/>
           </a:ln>
         </p:spPr>
+        <p:txBody>
+          <a:bodyPr/>
+          <a:p/>
+        </p:txBody>
       </p:sp>
       <p:sp>
         <p:nvSpPr>
@@ -33314,6 +34142,10 @@
             <a:tailEnd type="triangle"/>
           </a:ln>
         </p:spPr>
+        <p:txBody>
+          <a:bodyPr/>
+          <a:p/>
+        </p:txBody>
       </p:sp>
       <p:sp>
         <p:nvSpPr>
@@ -33380,6 +34212,10 @@
             <a:prstDash val="solid"/>
           </a:ln>
         </p:spPr>
+        <p:txBody>
+          <a:bodyPr/>
+          <a:p/>
+        </p:txBody>
       </p:sp>
       <p:sp>
         <p:nvSpPr>
@@ -33460,6 +34296,10 @@
             <a:tailEnd type="triangle"/>
           </a:ln>
         </p:spPr>
+        <p:txBody>
+          <a:bodyPr/>
+          <a:p/>
+        </p:txBody>
       </p:sp>
       <p:sp>
         <p:nvSpPr>
@@ -33526,6 +34366,10 @@
             <a:prstDash val="solid"/>
           </a:ln>
         </p:spPr>
+        <p:txBody>
+          <a:bodyPr/>
+          <a:p/>
+        </p:txBody>
       </p:sp>
       <p:sp>
         <p:nvSpPr>
@@ -33673,6 +34517,10 @@
           </a:solidFill>
           <a:ln/>
         </p:spPr>
+        <p:txBody>
+          <a:bodyPr/>
+          <a:p/>
+        </p:txBody>
       </p:sp>
       <p:sp>
         <p:nvSpPr>
@@ -33693,6 +34541,10 @@
           </a:solidFill>
           <a:ln/>
         </p:spPr>
+        <p:txBody>
+          <a:bodyPr/>
+          <a:p/>
+        </p:txBody>
       </p:sp>
       <p:sp>
         <p:nvSpPr>
@@ -33876,6 +34728,10 @@
             <a:prstDash val="solid"/>
           </a:ln>
         </p:spPr>
+        <p:txBody>
+          <a:bodyPr/>
+          <a:p/>
+        </p:txBody>
       </p:sp>
       <p:sp>
         <p:nvSpPr>
@@ -33942,6 +34798,10 @@
             <a:prstDash val="solid"/>
           </a:ln>
         </p:spPr>
+        <p:txBody>
+          <a:bodyPr/>
+          <a:p/>
+        </p:txBody>
       </p:sp>
       <p:sp>
         <p:nvSpPr>
@@ -33976,7 +34836,7 @@
                 <a:ea typeface="微软雅黑" pitchFamily="34" charset="-122"/>
                 <a:cs typeface="微软雅黑" pitchFamily="34" charset="-120"/>
               </a:rPr>
-              <a:t>①开 Agent</a:t>
+              <a:t>①确认出方向</a:t>
             </a:r>
             <a:endParaRPr lang="en-US" sz="1150" dirty="0"/>
           </a:p>
@@ -33993,7 +34853,7 @@
                 <a:ea typeface="微软雅黑" pitchFamily="34" charset="-122"/>
                 <a:cs typeface="微软雅黑" pitchFamily="34" charset="-120"/>
               </a:rPr>
-              <a:t>通信端口</a:t>
+              <a:t>默认放行</a:t>
             </a:r>
             <a:endParaRPr lang="en-US" sz="1150" dirty="0"/>
           </a:p>
@@ -34022,6 +34882,10 @@
             <a:tailEnd type="triangle"/>
           </a:ln>
         </p:spPr>
+        <p:txBody>
+          <a:bodyPr/>
+          <a:p/>
+        </p:txBody>
       </p:sp>
       <p:sp>
         <p:nvSpPr>
@@ -34049,6 +34913,10 @@
             <a:prstDash val="solid"/>
           </a:ln>
         </p:spPr>
+        <p:txBody>
+          <a:bodyPr/>
+          <a:p/>
+        </p:txBody>
       </p:sp>
       <p:sp>
         <p:nvSpPr>
@@ -34129,6 +34997,10 @@
             <a:tailEnd type="triangle"/>
           </a:ln>
         </p:spPr>
+        <p:txBody>
+          <a:bodyPr/>
+          <a:p/>
+        </p:txBody>
       </p:sp>
       <p:sp>
         <p:nvSpPr>
@@ -34156,6 +35028,10 @@
             <a:prstDash val="solid"/>
           </a:ln>
         </p:spPr>
+        <p:txBody>
+          <a:bodyPr/>
+          <a:p/>
+        </p:txBody>
       </p:sp>
       <p:sp>
         <p:nvSpPr>
@@ -34236,6 +35112,10 @@
             <a:tailEnd type="triangle"/>
           </a:ln>
         </p:spPr>
+        <p:txBody>
+          <a:bodyPr/>
+          <a:p/>
+        </p:txBody>
       </p:sp>
       <p:sp>
         <p:nvSpPr>
@@ -34263,6 +35143,10 @@
             <a:prstDash val="solid"/>
           </a:ln>
         </p:spPr>
+        <p:txBody>
+          <a:bodyPr/>
+          <a:p/>
+        </p:txBody>
       </p:sp>
       <p:sp>
         <p:nvSpPr>
@@ -34343,6 +35227,10 @@
             <a:tailEnd type="triangle"/>
           </a:ln>
         </p:spPr>
+        <p:txBody>
+          <a:bodyPr/>
+          <a:p/>
+        </p:txBody>
       </p:sp>
       <p:sp>
         <p:nvSpPr>
@@ -34370,6 +35258,10 @@
             <a:prstDash val="solid"/>
           </a:ln>
         </p:spPr>
+        <p:txBody>
+          <a:bodyPr/>
+          <a:p/>
+        </p:txBody>
       </p:sp>
       <p:sp>
         <p:nvSpPr>
@@ -34450,6 +35342,10 @@
             <a:tailEnd type="triangle"/>
           </a:ln>
         </p:spPr>
+        <p:txBody>
+          <a:bodyPr/>
+          <a:p/>
+        </p:txBody>
       </p:sp>
       <p:sp>
         <p:nvSpPr>
@@ -34477,6 +35373,10 @@
             <a:prstDash val="solid"/>
           </a:ln>
         </p:spPr>
+        <p:txBody>
+          <a:bodyPr/>
+          <a:p/>
+        </p:txBody>
       </p:sp>
       <p:sp>
         <p:nvSpPr>
@@ -34560,6 +35460,10 @@
             <a:prstDash val="solid"/>
           </a:ln>
         </p:spPr>
+        <p:txBody>
+          <a:bodyPr/>
+          <a:p/>
+        </p:txBody>
       </p:sp>
       <p:sp>
         <p:nvSpPr>
@@ -34594,7 +35498,7 @@
                 <a:ea typeface="微软雅黑" pitchFamily="34" charset="-122"/>
                 <a:cs typeface="微软雅黑" pitchFamily="34" charset="-120"/>
               </a:rPr>
-              <a:t>① 最容易漏：</a:t>
+              <a:t>① 出方向默认全放行，通常无需配置；若被收紧过，会出现“微服务治理”页“没有数据”。</a:t>
             </a:r>
             <a:pPr indent="0" marL="0">
               <a:buNone/>
@@ -34608,7 +35512,7 @@
                 <a:ea typeface="微软雅黑" pitchFamily="34" charset="-122"/>
                 <a:cs typeface="微软雅黑" pitchFamily="34" charset="-120"/>
               </a:rPr>
-              <a:t>ECS 安全组“出方向”不放通 8442/8443/8883，应用看似部署成功，但“微服务治理”页永远“没有数据”。</a:t>
+              <a:t/>
             </a:r>
             <a:endParaRPr lang="en-US" sz="1300" dirty="0"/>
           </a:p>
